--- a/Lecture2-Research-Ethics.pptx
+++ b/Lecture2-Research-Ethics.pptx
@@ -6159,7 +6159,7 @@
               </a:spcAft>
             </a:pPr>
             <a:r>
-              <a:rPr sz="1600" b="1" i="0">
+              <a:rPr sz="1920" b="1" i="0">
                 <a:solidFill>
                   <a:srgbClr val="E9C46A"/>
                 </a:solidFill>
@@ -6204,7 +6204,7 @@
               </a:spcAft>
             </a:pPr>
             <a:r>
-              <a:rPr sz="6000" b="1" i="0">
+              <a:rPr sz="7200" b="1" i="0">
                 <a:solidFill>
                   <a:srgbClr val="FFFFFF"/>
                 </a:solidFill>
@@ -6226,7 +6226,7 @@
               </a:spcAft>
             </a:pPr>
             <a:r>
-              <a:rPr sz="2100" b="0" i="1">
+              <a:rPr sz="2520" b="0" i="1">
                 <a:solidFill>
                   <a:srgbClr val="CFE6E2"/>
                 </a:solidFill>
@@ -6317,7 +6317,7 @@
               </a:spcAft>
             </a:pPr>
             <a:r>
-              <a:rPr sz="1400" b="1" i="0">
+              <a:rPr sz="1680" b="1" i="0">
                 <a:solidFill>
                   <a:srgbClr val="FFFFFF"/>
                 </a:solidFill>
@@ -6408,7 +6408,7 @@
               </a:spcAft>
             </a:pPr>
             <a:r>
-              <a:rPr sz="1400" b="1" i="0">
+              <a:rPr sz="1680" b="1" i="0">
                 <a:solidFill>
                   <a:srgbClr val="FFFFFF"/>
                 </a:solidFill>
@@ -6453,7 +6453,7 @@
               </a:spcAft>
             </a:pPr>
             <a:r>
-              <a:rPr sz="1400" b="0" i="0">
+              <a:rPr sz="1680" b="0" i="0">
                 <a:solidFill>
                   <a:srgbClr val="9FC7C2"/>
                 </a:solidFill>
@@ -6648,7 +6648,7 @@
               </a:spcAft>
             </a:pPr>
             <a:r>
-              <a:rPr sz="1250" b="1" i="0">
+              <a:rPr sz="1500" b="1" i="0">
                 <a:solidFill>
                   <a:srgbClr val="2A9D8F"/>
                 </a:solidFill>
@@ -6667,8 +6667,8 @@
         </p:nvSpPr>
         <p:spPr>
           <a:xfrm>
-            <a:off x="640080" y="822960"/>
-            <a:ext cx="10424160" cy="1005840"/>
+            <a:off x="640080" y="786384"/>
+            <a:ext cx="11064240" cy="914400"/>
           </a:xfrm>
           <a:prstGeom prst="rect">
             <a:avLst/>
@@ -6693,7 +6693,7 @@
               </a:spcAft>
             </a:pPr>
             <a:r>
-              <a:rPr sz="3200" b="1" i="0">
+              <a:rPr sz="3500" b="1" i="0">
                 <a:solidFill>
                   <a:srgbClr val="212A33"/>
                 </a:solidFill>
@@ -6713,7 +6713,7 @@
         <p:spPr>
           <a:xfrm>
             <a:off x="658368" y="1572768"/>
-            <a:ext cx="1371600" cy="54864"/>
+            <a:ext cx="1463040" cy="64008"/>
           </a:xfrm>
           <a:prstGeom prst="rect">
             <a:avLst/>
@@ -6782,7 +6782,7 @@
               </a:spcAft>
             </a:pPr>
             <a:r>
-              <a:rPr sz="1200" b="1" i="0">
+              <a:rPr sz="1439" b="1" i="0">
                 <a:solidFill>
                   <a:srgbClr val="5B6B73"/>
                 </a:solidFill>
@@ -6827,7 +6827,7 @@
               </a:spcAft>
             </a:pPr>
             <a:r>
-              <a:rPr sz="1000" b="0" i="0">
+              <a:rPr sz="1200" b="0" i="0">
                 <a:solidFill>
                   <a:srgbClr val="5B6B73"/>
                 </a:solidFill>
@@ -6872,7 +6872,7 @@
               </a:spcAft>
             </a:pPr>
             <a:r>
-              <a:rPr sz="1700" b="1" i="0">
+              <a:rPr sz="2039" b="1" i="0">
                 <a:solidFill>
                   <a:srgbClr val="3A7CA5"/>
                 </a:solidFill>
@@ -6881,7 +6881,7 @@
               <a:t>Respect for participants</a:t>
             </a:r>
             <a:r>
-              <a:rPr sz="1700" b="0" i="0">
+              <a:rPr sz="2039" b="0" i="0">
                 <a:solidFill>
                   <a:srgbClr val="212A33"/>
                 </a:solidFill>
@@ -6926,7 +6926,7 @@
               </a:spcAft>
             </a:pPr>
             <a:r>
-              <a:rPr sz="1600" b="1">
+              <a:rPr sz="1920" b="1">
                 <a:solidFill>
                   <a:srgbClr val="2A9D8F"/>
                 </a:solidFill>
@@ -6935,7 +6935,7 @@
               <a:t>•  </a:t>
             </a:r>
             <a:r>
-              <a:rPr sz="1600" b="0" i="0">
+              <a:rPr sz="1920" b="0" i="0">
                 <a:solidFill>
                   <a:srgbClr val="212A33"/>
                 </a:solidFill>
@@ -6944,7 +6944,7 @@
               <a:t>Know they are part of a study (its purpose is </a:t>
             </a:r>
             <a:r>
-              <a:rPr sz="1600" b="0" i="1">
+              <a:rPr sz="1920" b="0" i="1">
                 <a:solidFill>
                   <a:srgbClr val="212A33"/>
                 </a:solidFill>
@@ -6953,7 +6953,7 @@
               <a:t>disclosed</a:t>
             </a:r>
             <a:r>
-              <a:rPr sz="1600" b="0" i="0">
+              <a:rPr sz="1920" b="0" i="0">
                 <a:solidFill>
                   <a:srgbClr val="212A33"/>
                 </a:solidFill>
@@ -6975,7 +6975,7 @@
               </a:spcAft>
             </a:pPr>
             <a:r>
-              <a:rPr sz="1600" b="1">
+              <a:rPr sz="1920" b="1">
                 <a:solidFill>
                   <a:srgbClr val="2A9D8F"/>
                 </a:solidFill>
@@ -6984,7 +6984,7 @@
               <a:t>•  </a:t>
             </a:r>
             <a:r>
-              <a:rPr sz="1600" b="1" i="0">
+              <a:rPr sz="1920" b="1" i="0">
                 <a:solidFill>
                   <a:srgbClr val="212A33"/>
                 </a:solidFill>
@@ -6993,7 +6993,7 @@
               <a:t>Voluntarily</a:t>
             </a:r>
             <a:r>
-              <a:rPr sz="1600" b="0" i="0">
+              <a:rPr sz="1920" b="0" i="0">
                 <a:solidFill>
                   <a:srgbClr val="212A33"/>
                 </a:solidFill>
@@ -7136,7 +7136,7 @@
               </a:spcAft>
             </a:pPr>
             <a:r>
-              <a:rPr sz="1250" b="1" i="0">
+              <a:rPr sz="1500" b="1" i="0">
                 <a:solidFill>
                   <a:srgbClr val="2A9D8F"/>
                 </a:solidFill>
@@ -7158,7 +7158,7 @@
               </a:spcAft>
             </a:pPr>
             <a:r>
-              <a:rPr sz="1450" b="0" i="0">
+              <a:rPr sz="1739" b="0" i="0">
                 <a:solidFill>
                   <a:srgbClr val="212A33"/>
                 </a:solidFill>
@@ -7353,7 +7353,7 @@
               </a:spcAft>
             </a:pPr>
             <a:r>
-              <a:rPr sz="1250" b="1" i="0">
+              <a:rPr sz="1500" b="1" i="0">
                 <a:solidFill>
                   <a:srgbClr val="2A9D8F"/>
                 </a:solidFill>
@@ -7372,8 +7372,8 @@
         </p:nvSpPr>
         <p:spPr>
           <a:xfrm>
-            <a:off x="640080" y="822960"/>
-            <a:ext cx="10424160" cy="1005840"/>
+            <a:off x="640080" y="786384"/>
+            <a:ext cx="11064240" cy="914400"/>
           </a:xfrm>
           <a:prstGeom prst="rect">
             <a:avLst/>
@@ -7398,7 +7398,7 @@
               </a:spcAft>
             </a:pPr>
             <a:r>
-              <a:rPr sz="3200" b="1" i="0">
+              <a:rPr sz="3500" b="1" i="0">
                 <a:solidFill>
                   <a:srgbClr val="212A33"/>
                 </a:solidFill>
@@ -7418,7 +7418,7 @@
         <p:spPr>
           <a:xfrm>
             <a:off x="658368" y="1572768"/>
-            <a:ext cx="1371600" cy="54864"/>
+            <a:ext cx="1463040" cy="64008"/>
           </a:xfrm>
           <a:prstGeom prst="rect">
             <a:avLst/>
@@ -7487,7 +7487,7 @@
               </a:spcAft>
             </a:pPr>
             <a:r>
-              <a:rPr sz="1200" b="1" i="0">
+              <a:rPr sz="1439" b="1" i="0">
                 <a:solidFill>
                   <a:srgbClr val="5B6B73"/>
                 </a:solidFill>
@@ -7532,7 +7532,7 @@
               </a:spcAft>
             </a:pPr>
             <a:r>
-              <a:rPr sz="1000" b="0" i="0">
+              <a:rPr sz="1200" b="0" i="0">
                 <a:solidFill>
                   <a:srgbClr val="5B6B73"/>
                 </a:solidFill>
@@ -7577,7 +7577,7 @@
               </a:spcAft>
             </a:pPr>
             <a:r>
-              <a:rPr sz="1700" b="1" i="0">
+              <a:rPr sz="2039" b="1" i="0">
                 <a:solidFill>
                   <a:srgbClr val="6A4C93"/>
                 </a:solidFill>
@@ -7586,7 +7586,7 @@
               <a:t>Confidentiality and privacy</a:t>
             </a:r>
             <a:r>
-              <a:rPr sz="1700" b="0" i="0">
+              <a:rPr sz="2039" b="0" i="0">
                 <a:solidFill>
                   <a:srgbClr val="212A33"/>
                 </a:solidFill>
@@ -7631,7 +7631,7 @@
               </a:spcAft>
             </a:pPr>
             <a:r>
-              <a:rPr sz="1600" b="1">
+              <a:rPr sz="1920" b="1">
                 <a:solidFill>
                   <a:srgbClr val="2A9D8F"/>
                 </a:solidFill>
@@ -7640,7 +7640,7 @@
               <a:t>•  </a:t>
             </a:r>
             <a:r>
-              <a:rPr sz="1600" b="0" i="0">
+              <a:rPr sz="1920" b="0" i="0">
                 <a:solidFill>
                   <a:srgbClr val="212A33"/>
                 </a:solidFill>
@@ -7649,7 +7649,7 @@
               <a:t>Using </a:t>
             </a:r>
             <a:r>
-              <a:rPr sz="1600" b="1" i="0">
+              <a:rPr sz="1920" b="1" i="0">
                 <a:solidFill>
                   <a:srgbClr val="212A33"/>
                 </a:solidFill>
@@ -7658,7 +7658,7 @@
               <a:t>pseudonyms</a:t>
             </a:r>
             <a:r>
-              <a:rPr sz="1600" b="0" i="0">
+              <a:rPr sz="1920" b="0" i="0">
                 <a:solidFill>
                   <a:srgbClr val="212A33"/>
                 </a:solidFill>
@@ -7680,7 +7680,7 @@
               </a:spcAft>
             </a:pPr>
             <a:r>
-              <a:rPr sz="1600" b="1">
+              <a:rPr sz="1920" b="1">
                 <a:solidFill>
                   <a:srgbClr val="2A9D8F"/>
                 </a:solidFill>
@@ -7689,7 +7689,7 @@
               <a:t>•  </a:t>
             </a:r>
             <a:r>
-              <a:rPr sz="1600" b="0" i="0">
+              <a:rPr sz="1920" b="0" i="0">
                 <a:solidFill>
                   <a:srgbClr val="212A33"/>
                 </a:solidFill>
@@ -7698,7 +7698,7 @@
               <a:t>Separating names from responses when recording data </a:t>
             </a:r>
             <a:r>
-              <a:rPr sz="1600" b="0" i="1">
+              <a:rPr sz="1920" b="0" i="1">
                 <a:solidFill>
                   <a:srgbClr val="5B6B73"/>
                 </a:solidFill>
@@ -7841,7 +7841,7 @@
               </a:spcAft>
             </a:pPr>
             <a:r>
-              <a:rPr sz="1250" b="1" i="0">
+              <a:rPr sz="1500" b="1" i="0">
                 <a:solidFill>
                   <a:srgbClr val="2A9D8F"/>
                 </a:solidFill>
@@ -7863,7 +7863,7 @@
               </a:spcAft>
             </a:pPr>
             <a:r>
-              <a:rPr sz="1450" b="0" i="0">
+              <a:rPr sz="1739" b="0" i="0">
                 <a:solidFill>
                   <a:srgbClr val="212A33"/>
                 </a:solidFill>
@@ -8058,7 +8058,7 @@
               </a:spcAft>
             </a:pPr>
             <a:r>
-              <a:rPr sz="1250" b="1" i="0">
+              <a:rPr sz="1500" b="1" i="0">
                 <a:solidFill>
                   <a:srgbClr val="2A9D8F"/>
                 </a:solidFill>
@@ -8077,8 +8077,8 @@
         </p:nvSpPr>
         <p:spPr>
           <a:xfrm>
-            <a:off x="640080" y="822960"/>
-            <a:ext cx="10424160" cy="1005840"/>
+            <a:off x="640080" y="786384"/>
+            <a:ext cx="11064240" cy="914400"/>
           </a:xfrm>
           <a:prstGeom prst="rect">
             <a:avLst/>
@@ -8103,7 +8103,7 @@
               </a:spcAft>
             </a:pPr>
             <a:r>
-              <a:rPr sz="3200" b="1" i="0">
+              <a:rPr sz="3500" b="1" i="0">
                 <a:solidFill>
                   <a:srgbClr val="212A33"/>
                 </a:solidFill>
@@ -8123,7 +8123,7 @@
         <p:spPr>
           <a:xfrm>
             <a:off x="658368" y="1572768"/>
-            <a:ext cx="1371600" cy="54864"/>
+            <a:ext cx="1463040" cy="64008"/>
           </a:xfrm>
           <a:prstGeom prst="rect">
             <a:avLst/>
@@ -8192,7 +8192,7 @@
               </a:spcAft>
             </a:pPr>
             <a:r>
-              <a:rPr sz="1200" b="1" i="0">
+              <a:rPr sz="1439" b="1" i="0">
                 <a:solidFill>
                   <a:srgbClr val="5B6B73"/>
                 </a:solidFill>
@@ -8237,7 +8237,7 @@
               </a:spcAft>
             </a:pPr>
             <a:r>
-              <a:rPr sz="1000" b="0" i="0">
+              <a:rPr sz="1200" b="0" i="0">
                 <a:solidFill>
                   <a:srgbClr val="5B6B73"/>
                 </a:solidFill>
@@ -8282,7 +8282,7 @@
               </a:spcAft>
             </a:pPr>
             <a:r>
-              <a:rPr sz="1700" b="1" i="0">
+              <a:rPr sz="2039" b="1" i="0">
                 <a:solidFill>
                   <a:srgbClr val="E76F51"/>
                 </a:solidFill>
@@ -8291,7 +8291,7 @@
               <a:t>Avoiding harm</a:t>
             </a:r>
             <a:r>
-              <a:rPr sz="1700" b="0" i="0">
+              <a:rPr sz="2039" b="0" i="0">
                 <a:solidFill>
                   <a:srgbClr val="212A33"/>
                 </a:solidFill>
@@ -8336,7 +8336,7 @@
               </a:spcAft>
             </a:pPr>
             <a:r>
-              <a:rPr sz="1600" b="1">
+              <a:rPr sz="1920" b="1">
                 <a:solidFill>
                   <a:srgbClr val="2A9D8F"/>
                 </a:solidFill>
@@ -8345,7 +8345,7 @@
               <a:t>•  </a:t>
             </a:r>
             <a:r>
-              <a:rPr sz="1600" b="0" i="0">
+              <a:rPr sz="1920" b="0" i="0">
                 <a:solidFill>
                   <a:srgbClr val="212A33"/>
                 </a:solidFill>
@@ -8354,7 +8354,7 @@
               <a:t>Not deceiving or exploiting participants </a:t>
             </a:r>
             <a:r>
-              <a:rPr sz="1600" b="0" i="1">
+              <a:rPr sz="1920" b="0" i="1">
                 <a:solidFill>
                   <a:srgbClr val="5B6B73"/>
                 </a:solidFill>
@@ -8376,7 +8376,7 @@
               </a:spcAft>
             </a:pPr>
             <a:r>
-              <a:rPr sz="1600" b="1">
+              <a:rPr sz="1920" b="1">
                 <a:solidFill>
                   <a:srgbClr val="2A9D8F"/>
                 </a:solidFill>
@@ -8385,7 +8385,7 @@
               <a:t>•  </a:t>
             </a:r>
             <a:r>
-              <a:rPr sz="1600" b="0" i="0">
+              <a:rPr sz="1920" b="0" i="0">
                 <a:solidFill>
                   <a:srgbClr val="212A33"/>
                 </a:solidFill>
@@ -8407,7 +8407,7 @@
               </a:spcAft>
             </a:pPr>
             <a:r>
-              <a:rPr sz="1600" b="1">
+              <a:rPr sz="1920" b="1">
                 <a:solidFill>
                   <a:srgbClr val="2A9D8F"/>
                 </a:solidFill>
@@ -8416,7 +8416,7 @@
               <a:t>•  </a:t>
             </a:r>
             <a:r>
-              <a:rPr sz="1600" b="0" i="0">
+              <a:rPr sz="1920" b="0" i="0">
                 <a:solidFill>
                   <a:srgbClr val="212A33"/>
                 </a:solidFill>
@@ -8559,7 +8559,7 @@
               </a:spcAft>
             </a:pPr>
             <a:r>
-              <a:rPr sz="1250" b="1" i="0">
+              <a:rPr sz="1500" b="1" i="0">
                 <a:solidFill>
                   <a:srgbClr val="2A9D8F"/>
                 </a:solidFill>
@@ -8581,7 +8581,7 @@
               </a:spcAft>
             </a:pPr>
             <a:r>
-              <a:rPr sz="1450" b="0" i="0">
+              <a:rPr sz="1739" b="0" i="0">
                 <a:solidFill>
                   <a:srgbClr val="212A33"/>
                 </a:solidFill>
@@ -8776,7 +8776,7 @@
               </a:spcAft>
             </a:pPr>
             <a:r>
-              <a:rPr sz="1250" b="1" i="0">
+              <a:rPr sz="1500" b="1" i="0">
                 <a:solidFill>
                   <a:srgbClr val="2A9D8F"/>
                 </a:solidFill>
@@ -8795,8 +8795,8 @@
         </p:nvSpPr>
         <p:spPr>
           <a:xfrm>
-            <a:off x="640080" y="822960"/>
-            <a:ext cx="10424160" cy="1005840"/>
+            <a:off x="640080" y="786384"/>
+            <a:ext cx="11064240" cy="914400"/>
           </a:xfrm>
           <a:prstGeom prst="rect">
             <a:avLst/>
@@ -8821,7 +8821,7 @@
               </a:spcAft>
             </a:pPr>
             <a:r>
-              <a:rPr sz="3200" b="1" i="0">
+              <a:rPr sz="3500" b="1" i="0">
                 <a:solidFill>
                   <a:srgbClr val="212A33"/>
                 </a:solidFill>
@@ -8841,7 +8841,7 @@
         <p:spPr>
           <a:xfrm>
             <a:off x="658368" y="1572768"/>
-            <a:ext cx="1371600" cy="54864"/>
+            <a:ext cx="1463040" cy="64008"/>
           </a:xfrm>
           <a:prstGeom prst="rect">
             <a:avLst/>
@@ -8910,7 +8910,7 @@
               </a:spcAft>
             </a:pPr>
             <a:r>
-              <a:rPr sz="1200" b="1" i="0">
+              <a:rPr sz="1439" b="1" i="0">
                 <a:solidFill>
                   <a:srgbClr val="5B6B73"/>
                 </a:solidFill>
@@ -8955,7 +8955,7 @@
               </a:spcAft>
             </a:pPr>
             <a:r>
-              <a:rPr sz="1000" b="0" i="0">
+              <a:rPr sz="1200" b="0" i="0">
                 <a:solidFill>
                   <a:srgbClr val="5B6B73"/>
                 </a:solidFill>
@@ -8975,7 +8975,7 @@
         <p:spPr>
           <a:xfrm>
             <a:off x="640080" y="1783080"/>
-            <a:ext cx="1234440" cy="384048"/>
+            <a:ext cx="1463040" cy="420624"/>
           </a:xfrm>
           <a:prstGeom prst="roundRect">
             <a:avLst>
@@ -9010,7 +9010,7 @@
           <a:p>
             <a:pPr algn="ctr"/>
             <a:r>
-              <a:rPr sz="1250" b="1">
+              <a:rPr sz="1500" b="1">
                 <a:solidFill>
                   <a:srgbClr val="FFFFFF"/>
                 </a:solidFill>
@@ -9029,8 +9029,8 @@
         </p:nvSpPr>
         <p:spPr>
           <a:xfrm>
-            <a:off x="2057400" y="1810512"/>
-            <a:ext cx="9509760" cy="640080"/>
+            <a:off x="2331720" y="1737360"/>
+            <a:ext cx="9144000" cy="731520"/>
           </a:xfrm>
           <a:prstGeom prst="rect">
             <a:avLst/>
@@ -9055,7 +9055,7 @@
               </a:spcAft>
             </a:pPr>
             <a:r>
-              <a:rPr sz="1450" b="0" i="0">
+              <a:rPr sz="1739" b="0" i="0">
                 <a:solidFill>
                   <a:srgbClr val="212A33"/>
                 </a:solidFill>
@@ -9064,7 +9064,7 @@
               <a:t>For each mini-scenario, decide </a:t>
             </a:r>
             <a:r>
-              <a:rPr sz="1450" b="1" i="0">
+              <a:rPr sz="1739" b="1" i="0">
                 <a:solidFill>
                   <a:srgbClr val="212A33"/>
                 </a:solidFill>
@@ -9073,7 +9073,7 @@
               <a:t>which of the four standards</a:t>
             </a:r>
             <a:r>
-              <a:rPr sz="1450" b="0" i="0">
+              <a:rPr sz="1739" b="0" i="0">
                 <a:solidFill>
                   <a:srgbClr val="212A33"/>
                 </a:solidFill>
@@ -9216,7 +9216,7 @@
               </a:spcAft>
             </a:pPr>
             <a:r>
-              <a:rPr sz="1600" b="1" i="0">
+              <a:rPr sz="1920" b="1" i="0">
                 <a:solidFill>
                   <a:srgbClr val="FFFFFF"/>
                 </a:solidFill>
@@ -9261,7 +9261,7 @@
               </a:spcAft>
             </a:pPr>
             <a:r>
-              <a:rPr sz="1350" b="0" i="0">
+              <a:rPr sz="1620" b="0" i="0">
                 <a:solidFill>
                   <a:srgbClr val="212A33"/>
                 </a:solidFill>
@@ -9404,7 +9404,7 @@
               </a:spcAft>
             </a:pPr>
             <a:r>
-              <a:rPr sz="1600" b="1" i="0">
+              <a:rPr sz="1920" b="1" i="0">
                 <a:solidFill>
                   <a:srgbClr val="FFFFFF"/>
                 </a:solidFill>
@@ -9449,7 +9449,7 @@
               </a:spcAft>
             </a:pPr>
             <a:r>
-              <a:rPr sz="1350" b="0" i="0">
+              <a:rPr sz="1620" b="0" i="0">
                 <a:solidFill>
                   <a:srgbClr val="212A33"/>
                 </a:solidFill>
@@ -9592,7 +9592,7 @@
               </a:spcAft>
             </a:pPr>
             <a:r>
-              <a:rPr sz="1600" b="1" i="0">
+              <a:rPr sz="1920" b="1" i="0">
                 <a:solidFill>
                   <a:srgbClr val="FFFFFF"/>
                 </a:solidFill>
@@ -9637,7 +9637,7 @@
               </a:spcAft>
             </a:pPr>
             <a:r>
-              <a:rPr sz="1350" b="0" i="0">
+              <a:rPr sz="1620" b="0" i="0">
                 <a:solidFill>
                   <a:srgbClr val="212A33"/>
                 </a:solidFill>
@@ -9780,7 +9780,7 @@
               </a:spcAft>
             </a:pPr>
             <a:r>
-              <a:rPr sz="1600" b="1" i="0">
+              <a:rPr sz="1920" b="1" i="0">
                 <a:solidFill>
                   <a:srgbClr val="FFFFFF"/>
                 </a:solidFill>
@@ -9825,7 +9825,7 @@
               </a:spcAft>
             </a:pPr>
             <a:r>
-              <a:rPr sz="1350" b="0" i="0">
+              <a:rPr sz="1620" b="0" i="0">
                 <a:solidFill>
                   <a:srgbClr val="212A33"/>
                 </a:solidFill>
@@ -9870,7 +9870,7 @@
               </a:spcAft>
             </a:pPr>
             <a:r>
-              <a:rPr sz="1300" b="0" i="1">
+              <a:rPr sz="1560" b="0" i="1">
                 <a:solidFill>
                   <a:srgbClr val="5B6B73"/>
                 </a:solidFill>
@@ -9967,7 +9967,7 @@
               </a:spcAft>
             </a:pPr>
             <a:r>
-              <a:rPr sz="1600" b="1" i="0">
+              <a:rPr sz="1920" b="1" i="0">
                 <a:solidFill>
                   <a:srgbClr val="FFFFFF"/>
                 </a:solidFill>
@@ -10064,7 +10064,7 @@
               </a:spcAft>
             </a:pPr>
             <a:r>
-              <a:rPr sz="1600" b="1" i="0">
+              <a:rPr sz="1920" b="1" i="0">
                 <a:solidFill>
                   <a:srgbClr val="FFFFFF"/>
                 </a:solidFill>
@@ -10161,7 +10161,7 @@
               </a:spcAft>
             </a:pPr>
             <a:r>
-              <a:rPr sz="1600" b="1" i="0">
+              <a:rPr sz="1920" b="1" i="0">
                 <a:solidFill>
                   <a:srgbClr val="FFFFFF"/>
                 </a:solidFill>
@@ -10258,7 +10258,7 @@
               </a:spcAft>
             </a:pPr>
             <a:r>
-              <a:rPr sz="1600" b="1" i="0">
+              <a:rPr sz="1920" b="1" i="0">
                 <a:solidFill>
                   <a:srgbClr val="FFFFFF"/>
                 </a:solidFill>
@@ -10303,7 +10303,7 @@
               </a:spcAft>
             </a:pPr>
             <a:r>
-              <a:rPr sz="1400" b="0" i="1">
+              <a:rPr sz="1680" b="0" i="1">
                 <a:solidFill>
                   <a:srgbClr val="5B6B73"/>
                 </a:solidFill>
@@ -10498,7 +10498,7 @@
               </a:spcAft>
             </a:pPr>
             <a:r>
-              <a:rPr sz="1250" b="1" i="0">
+              <a:rPr sz="1500" b="1" i="0">
                 <a:solidFill>
                   <a:srgbClr val="C99A2E"/>
                 </a:solidFill>
@@ -10517,8 +10517,8 @@
         </p:nvSpPr>
         <p:spPr>
           <a:xfrm>
-            <a:off x="640080" y="822960"/>
-            <a:ext cx="10424160" cy="1005840"/>
+            <a:off x="640080" y="786384"/>
+            <a:ext cx="11064240" cy="914400"/>
           </a:xfrm>
           <a:prstGeom prst="rect">
             <a:avLst/>
@@ -10543,7 +10543,7 @@
               </a:spcAft>
             </a:pPr>
             <a:r>
-              <a:rPr sz="3200" b="1" i="0">
+              <a:rPr sz="3500" b="1" i="0">
                 <a:solidFill>
                   <a:srgbClr val="212A33"/>
                 </a:solidFill>
@@ -10563,7 +10563,7 @@
         <p:spPr>
           <a:xfrm>
             <a:off x="658368" y="1572768"/>
-            <a:ext cx="1371600" cy="54864"/>
+            <a:ext cx="1463040" cy="64008"/>
           </a:xfrm>
           <a:prstGeom prst="rect">
             <a:avLst/>
@@ -10632,7 +10632,7 @@
               </a:spcAft>
             </a:pPr>
             <a:r>
-              <a:rPr sz="1200" b="1" i="0">
+              <a:rPr sz="1439" b="1" i="0">
                 <a:solidFill>
                   <a:srgbClr val="5B6B73"/>
                 </a:solidFill>
@@ -10677,7 +10677,7 @@
               </a:spcAft>
             </a:pPr>
             <a:r>
-              <a:rPr sz="1000" b="0" i="0">
+              <a:rPr sz="1200" b="0" i="0">
                 <a:solidFill>
                   <a:srgbClr val="5B6B73"/>
                 </a:solidFill>
@@ -10745,7 +10745,7 @@
               </a:spcAft>
             </a:pPr>
             <a:r>
-              <a:rPr sz="1200" b="1">
+              <a:rPr sz="1439" b="1">
                 <a:solidFill>
                   <a:srgbClr val="FFFFFF"/>
                 </a:solidFill>
@@ -10807,7 +10807,7 @@
               </a:spcAft>
             </a:pPr>
             <a:r>
-              <a:rPr sz="1200" b="1">
+              <a:rPr sz="1439" b="1">
                 <a:solidFill>
                   <a:srgbClr val="5B6B73"/>
                 </a:solidFill>
@@ -10826,7 +10826,7 @@
               </a:spcAft>
             </a:pPr>
             <a:r>
-              <a:rPr sz="1200" b="1">
+              <a:rPr sz="1439" b="1">
                 <a:solidFill>
                   <a:srgbClr val="5B6B73"/>
                 </a:solidFill>
@@ -10888,7 +10888,7 @@
               </a:spcAft>
             </a:pPr>
             <a:r>
-              <a:rPr sz="1200" b="1">
+              <a:rPr sz="1439" b="1">
                 <a:solidFill>
                   <a:srgbClr val="5B6B73"/>
                 </a:solidFill>
@@ -10907,7 +10907,7 @@
               </a:spcAft>
             </a:pPr>
             <a:r>
-              <a:rPr sz="1200" b="1">
+              <a:rPr sz="1439" b="1">
                 <a:solidFill>
                   <a:srgbClr val="5B6B73"/>
                 </a:solidFill>
@@ -10969,7 +10969,7 @@
               </a:spcAft>
             </a:pPr>
             <a:r>
-              <a:rPr sz="1200" b="1">
+              <a:rPr sz="1439" b="1">
                 <a:solidFill>
                   <a:srgbClr val="5B6B73"/>
                 </a:solidFill>
@@ -10988,7 +10988,7 @@
               </a:spcAft>
             </a:pPr>
             <a:r>
-              <a:rPr sz="1200" b="1">
+              <a:rPr sz="1439" b="1">
                 <a:solidFill>
                   <a:srgbClr val="5B6B73"/>
                 </a:solidFill>
@@ -11050,7 +11050,7 @@
               </a:spcAft>
             </a:pPr>
             <a:r>
-              <a:rPr sz="1200" b="1">
+              <a:rPr sz="1439" b="1">
                 <a:solidFill>
                   <a:srgbClr val="5B6B73"/>
                 </a:solidFill>
@@ -11069,7 +11069,7 @@
               </a:spcAft>
             </a:pPr>
             <a:r>
-              <a:rPr sz="1200" b="1">
+              <a:rPr sz="1439" b="1">
                 <a:solidFill>
                   <a:srgbClr val="5B6B73"/>
                 </a:solidFill>
@@ -11114,7 +11114,7 @@
               </a:spcAft>
             </a:pPr>
             <a:r>
-              <a:rPr sz="1700" b="0" i="0">
+              <a:rPr sz="2039" b="0" i="0">
                 <a:solidFill>
                   <a:srgbClr val="212A33"/>
                 </a:solidFill>
@@ -11123,7 +11123,7 @@
               <a:t>At the </a:t>
             </a:r>
             <a:r>
-              <a:rPr sz="1700" b="1" i="0">
+              <a:rPr sz="2039" b="1" i="0">
                 <a:solidFill>
                   <a:srgbClr val="C99A2E"/>
                 </a:solidFill>
@@ -11132,7 +11132,7 @@
               <a:t>planning stage</a:t>
             </a:r>
             <a:r>
-              <a:rPr sz="1700" b="0" i="0">
+              <a:rPr sz="2039" b="0" i="0">
                 <a:solidFill>
                   <a:srgbClr val="212A33"/>
                 </a:solidFill>
@@ -11177,7 +11177,7 @@
               </a:spcAft>
             </a:pPr>
             <a:r>
-              <a:rPr sz="1600" b="1">
+              <a:rPr sz="1920" b="1">
                 <a:solidFill>
                   <a:srgbClr val="C99A2E"/>
                 </a:solidFill>
@@ -11186,7 +11186,7 @@
               <a:t>•  </a:t>
             </a:r>
             <a:r>
-              <a:rPr sz="1600" b="0" i="0">
+              <a:rPr sz="1920" b="0" i="0">
                 <a:solidFill>
                   <a:srgbClr val="212A33"/>
                 </a:solidFill>
@@ -11195,7 +11195,7 @@
               <a:t>Choosing a research problem responsibly — one that could genuinely </a:t>
             </a:r>
             <a:r>
-              <a:rPr sz="1600" b="1" i="0">
+              <a:rPr sz="1920" b="1" i="0">
                 <a:solidFill>
                   <a:srgbClr val="212A33"/>
                 </a:solidFill>
@@ -11204,7 +11204,7 @@
               <a:t>benefit</a:t>
             </a:r>
             <a:r>
-              <a:rPr sz="1600" b="0" i="0">
+              <a:rPr sz="1920" b="0" i="0">
                 <a:solidFill>
                   <a:srgbClr val="212A33"/>
                 </a:solidFill>
@@ -11213,7 +11213,7 @@
               <a:t> participants, not just satisfy curiosity </a:t>
             </a:r>
             <a:r>
-              <a:rPr sz="1600" b="0" i="1">
+              <a:rPr sz="1920" b="0" i="1">
                 <a:solidFill>
                   <a:srgbClr val="5B6B73"/>
                 </a:solidFill>
@@ -11235,7 +11235,7 @@
               </a:spcAft>
             </a:pPr>
             <a:r>
-              <a:rPr sz="1600" b="1">
+              <a:rPr sz="1920" b="1">
                 <a:solidFill>
                   <a:srgbClr val="C99A2E"/>
                 </a:solidFill>
@@ -11244,7 +11244,7 @@
               <a:t>•  </a:t>
             </a:r>
             <a:r>
-              <a:rPr sz="1600" b="0" i="0">
+              <a:rPr sz="1920" b="0" i="0">
                 <a:solidFill>
                   <a:srgbClr val="212A33"/>
                 </a:solidFill>
@@ -11387,7 +11387,7 @@
               </a:spcAft>
             </a:pPr>
             <a:r>
-              <a:rPr sz="1250" b="1" i="0">
+              <a:rPr sz="1500" b="1" i="0">
                 <a:solidFill>
                   <a:srgbClr val="C99A2E"/>
                 </a:solidFill>
@@ -11409,7 +11409,7 @@
               </a:spcAft>
             </a:pPr>
             <a:r>
-              <a:rPr sz="1450" b="0" i="0">
+              <a:rPr sz="1739" b="0" i="0">
                 <a:solidFill>
                   <a:srgbClr val="212A33"/>
                 </a:solidFill>
@@ -11418,7 +11418,7 @@
               <a:t>Choosing to test a low-cost filter </a:t>
             </a:r>
             <a:r>
-              <a:rPr sz="1450" b="0" i="1">
+              <a:rPr sz="1739" b="0" i="1">
                 <a:solidFill>
                   <a:srgbClr val="212A33"/>
                 </a:solidFill>
@@ -11427,7 +11427,7 @@
               <a:t>because the community lacks access to safe water</a:t>
             </a:r>
             <a:r>
-              <a:rPr sz="1450" b="0" i="0">
+              <a:rPr sz="1739" b="0" i="0">
                 <a:solidFill>
                   <a:srgbClr val="212A33"/>
                 </a:solidFill>
@@ -11622,7 +11622,7 @@
               </a:spcAft>
             </a:pPr>
             <a:r>
-              <a:rPr sz="1250" b="1" i="0">
+              <a:rPr sz="1500" b="1" i="0">
                 <a:solidFill>
                   <a:srgbClr val="C99A2E"/>
                 </a:solidFill>
@@ -11641,8 +11641,8 @@
         </p:nvSpPr>
         <p:spPr>
           <a:xfrm>
-            <a:off x="640080" y="822960"/>
-            <a:ext cx="10424160" cy="1005840"/>
+            <a:off x="640080" y="786384"/>
+            <a:ext cx="11064240" cy="914400"/>
           </a:xfrm>
           <a:prstGeom prst="rect">
             <a:avLst/>
@@ -11667,7 +11667,7 @@
               </a:spcAft>
             </a:pPr>
             <a:r>
-              <a:rPr sz="3200" b="1" i="0">
+              <a:rPr sz="3500" b="1" i="0">
                 <a:solidFill>
                   <a:srgbClr val="212A33"/>
                 </a:solidFill>
@@ -11687,7 +11687,7 @@
         <p:spPr>
           <a:xfrm>
             <a:off x="658368" y="1572768"/>
-            <a:ext cx="1371600" cy="54864"/>
+            <a:ext cx="1463040" cy="64008"/>
           </a:xfrm>
           <a:prstGeom prst="rect">
             <a:avLst/>
@@ -11756,7 +11756,7 @@
               </a:spcAft>
             </a:pPr>
             <a:r>
-              <a:rPr sz="1200" b="1" i="0">
+              <a:rPr sz="1439" b="1" i="0">
                 <a:solidFill>
                   <a:srgbClr val="5B6B73"/>
                 </a:solidFill>
@@ -11801,7 +11801,7 @@
               </a:spcAft>
             </a:pPr>
             <a:r>
-              <a:rPr sz="1000" b="0" i="0">
+              <a:rPr sz="1200" b="0" i="0">
                 <a:solidFill>
                   <a:srgbClr val="5B6B73"/>
                 </a:solidFill>
@@ -11863,7 +11863,7 @@
               </a:spcAft>
             </a:pPr>
             <a:r>
-              <a:rPr sz="1200" b="1">
+              <a:rPr sz="1439" b="1">
                 <a:solidFill>
                   <a:srgbClr val="5B6B73"/>
                 </a:solidFill>
@@ -11925,7 +11925,7 @@
               </a:spcAft>
             </a:pPr>
             <a:r>
-              <a:rPr sz="1200" b="1">
+              <a:rPr sz="1439" b="1">
                 <a:solidFill>
                   <a:srgbClr val="5B6B73"/>
                 </a:solidFill>
@@ -11944,7 +11944,7 @@
               </a:spcAft>
             </a:pPr>
             <a:r>
-              <a:rPr sz="1200" b="1">
+              <a:rPr sz="1439" b="1">
                 <a:solidFill>
                   <a:srgbClr val="5B6B73"/>
                 </a:solidFill>
@@ -12012,7 +12012,7 @@
               </a:spcAft>
             </a:pPr>
             <a:r>
-              <a:rPr sz="1200" b="1">
+              <a:rPr sz="1439" b="1">
                 <a:solidFill>
                   <a:srgbClr val="FFFFFF"/>
                 </a:solidFill>
@@ -12031,7 +12031,7 @@
               </a:spcAft>
             </a:pPr>
             <a:r>
-              <a:rPr sz="1200" b="1">
+              <a:rPr sz="1439" b="1">
                 <a:solidFill>
                   <a:srgbClr val="FFFFFF"/>
                 </a:solidFill>
@@ -12093,7 +12093,7 @@
               </a:spcAft>
             </a:pPr>
             <a:r>
-              <a:rPr sz="1200" b="1">
+              <a:rPr sz="1439" b="1">
                 <a:solidFill>
                   <a:srgbClr val="5B6B73"/>
                 </a:solidFill>
@@ -12112,7 +12112,7 @@
               </a:spcAft>
             </a:pPr>
             <a:r>
-              <a:rPr sz="1200" b="1">
+              <a:rPr sz="1439" b="1">
                 <a:solidFill>
                   <a:srgbClr val="5B6B73"/>
                 </a:solidFill>
@@ -12174,7 +12174,7 @@
               </a:spcAft>
             </a:pPr>
             <a:r>
-              <a:rPr sz="1200" b="1">
+              <a:rPr sz="1439" b="1">
                 <a:solidFill>
                   <a:srgbClr val="5B6B73"/>
                 </a:solidFill>
@@ -12193,7 +12193,7 @@
               </a:spcAft>
             </a:pPr>
             <a:r>
-              <a:rPr sz="1200" b="1">
+              <a:rPr sz="1439" b="1">
                 <a:solidFill>
                   <a:srgbClr val="5B6B73"/>
                 </a:solidFill>
@@ -12238,7 +12238,7 @@
               </a:spcAft>
             </a:pPr>
             <a:r>
-              <a:rPr sz="1700" b="0" i="0">
+              <a:rPr sz="2039" b="0" i="0">
                 <a:solidFill>
                   <a:srgbClr val="212A33"/>
                 </a:solidFill>
@@ -12247,7 +12247,7 @@
               <a:t>At the </a:t>
             </a:r>
             <a:r>
-              <a:rPr sz="1700" b="1" i="0">
+              <a:rPr sz="2039" b="1" i="0">
                 <a:solidFill>
                   <a:srgbClr val="C99A2E"/>
                 </a:solidFill>
@@ -12256,7 +12256,7 @@
               <a:t>data collection stage</a:t>
             </a:r>
             <a:r>
-              <a:rPr sz="1700" b="0" i="0">
+              <a:rPr sz="2039" b="0" i="0">
                 <a:solidFill>
                   <a:srgbClr val="212A33"/>
                 </a:solidFill>
@@ -12301,7 +12301,7 @@
               </a:spcAft>
             </a:pPr>
             <a:r>
-              <a:rPr sz="1600" b="1">
+              <a:rPr sz="1920" b="1">
                 <a:solidFill>
                   <a:srgbClr val="C99A2E"/>
                 </a:solidFill>
@@ -12310,7 +12310,7 @@
               <a:t>•  </a:t>
             </a:r>
             <a:r>
-              <a:rPr sz="1600" b="0" i="0">
+              <a:rPr sz="1920" b="0" i="0">
                 <a:solidFill>
                   <a:srgbClr val="212A33"/>
                 </a:solidFill>
@@ -12332,7 +12332,7 @@
               </a:spcAft>
             </a:pPr>
             <a:r>
-              <a:rPr sz="1600" b="1">
+              <a:rPr sz="1920" b="1">
                 <a:solidFill>
                   <a:srgbClr val="C99A2E"/>
                 </a:solidFill>
@@ -12341,7 +12341,7 @@
               <a:t>•  </a:t>
             </a:r>
             <a:r>
-              <a:rPr sz="1600" b="0" i="0">
+              <a:rPr sz="1920" b="0" i="0">
                 <a:solidFill>
                   <a:srgbClr val="212A33"/>
                 </a:solidFill>
@@ -12350,7 +12350,7 @@
               <a:t>Never pressuring or </a:t>
             </a:r>
             <a:r>
-              <a:rPr sz="1600" b="1" i="0">
+              <a:rPr sz="1920" b="1" i="0">
                 <a:solidFill>
                   <a:srgbClr val="212A33"/>
                 </a:solidFill>
@@ -12359,7 +12359,7 @@
               <a:t>coercing</a:t>
             </a:r>
             <a:r>
-              <a:rPr sz="1600" b="0" i="0">
+              <a:rPr sz="1920" b="0" i="0">
                 <a:solidFill>
                   <a:srgbClr val="212A33"/>
                 </a:solidFill>
@@ -12368,7 +12368,7 @@
               <a:t> participation </a:t>
             </a:r>
             <a:r>
-              <a:rPr sz="1600" b="0" i="1">
+              <a:rPr sz="1920" b="0" i="1">
                 <a:solidFill>
                   <a:srgbClr val="5B6B73"/>
                 </a:solidFill>
@@ -12390,7 +12390,7 @@
               </a:spcAft>
             </a:pPr>
             <a:r>
-              <a:rPr sz="1600" b="1">
+              <a:rPr sz="1920" b="1">
                 <a:solidFill>
                   <a:srgbClr val="C99A2E"/>
                 </a:solidFill>
@@ -12399,7 +12399,7 @@
               <a:t>•  </a:t>
             </a:r>
             <a:r>
-              <a:rPr sz="1600" b="0" i="0">
+              <a:rPr sz="1920" b="0" i="0">
                 <a:solidFill>
                   <a:srgbClr val="212A33"/>
                 </a:solidFill>
@@ -12408,7 +12408,7 @@
               <a:t>Never </a:t>
             </a:r>
             <a:r>
-              <a:rPr sz="1600" b="1" i="0">
+              <a:rPr sz="1920" b="1" i="0">
                 <a:solidFill>
                   <a:srgbClr val="212A33"/>
                 </a:solidFill>
@@ -12417,7 +12417,7 @@
               <a:t>fabricating</a:t>
             </a:r>
             <a:r>
-              <a:rPr sz="1600" b="0" i="0">
+              <a:rPr sz="1920" b="0" i="0">
                 <a:solidFill>
                   <a:srgbClr val="212A33"/>
                 </a:solidFill>
@@ -12560,7 +12560,7 @@
               </a:spcAft>
             </a:pPr>
             <a:r>
-              <a:rPr sz="1250" b="1" i="0">
+              <a:rPr sz="1500" b="1" i="0">
                 <a:solidFill>
                   <a:srgbClr val="C99A2E"/>
                 </a:solidFill>
@@ -12582,7 +12582,7 @@
               </a:spcAft>
             </a:pPr>
             <a:r>
-              <a:rPr sz="1450" b="0" i="0">
+              <a:rPr sz="1739" b="0" i="0">
                 <a:solidFill>
                   <a:srgbClr val="212A33"/>
                 </a:solidFill>
@@ -12777,7 +12777,7 @@
               </a:spcAft>
             </a:pPr>
             <a:r>
-              <a:rPr sz="1250" b="1" i="0">
+              <a:rPr sz="1500" b="1" i="0">
                 <a:solidFill>
                   <a:srgbClr val="C99A2E"/>
                 </a:solidFill>
@@ -12796,8 +12796,8 @@
         </p:nvSpPr>
         <p:spPr>
           <a:xfrm>
-            <a:off x="640080" y="822960"/>
-            <a:ext cx="10424160" cy="1005840"/>
+            <a:off x="640080" y="786384"/>
+            <a:ext cx="11064240" cy="914400"/>
           </a:xfrm>
           <a:prstGeom prst="rect">
             <a:avLst/>
@@ -12822,7 +12822,7 @@
               </a:spcAft>
             </a:pPr>
             <a:r>
-              <a:rPr sz="3200" b="1" i="0">
+              <a:rPr sz="3500" b="1" i="0">
                 <a:solidFill>
                   <a:srgbClr val="212A33"/>
                 </a:solidFill>
@@ -12842,7 +12842,7 @@
         <p:spPr>
           <a:xfrm>
             <a:off x="658368" y="1572768"/>
-            <a:ext cx="1371600" cy="54864"/>
+            <a:ext cx="1463040" cy="64008"/>
           </a:xfrm>
           <a:prstGeom prst="rect">
             <a:avLst/>
@@ -12911,7 +12911,7 @@
               </a:spcAft>
             </a:pPr>
             <a:r>
-              <a:rPr sz="1200" b="1" i="0">
+              <a:rPr sz="1439" b="1" i="0">
                 <a:solidFill>
                   <a:srgbClr val="5B6B73"/>
                 </a:solidFill>
@@ -12956,7 +12956,7 @@
               </a:spcAft>
             </a:pPr>
             <a:r>
-              <a:rPr sz="1000" b="0" i="0">
+              <a:rPr sz="1200" b="0" i="0">
                 <a:solidFill>
                   <a:srgbClr val="5B6B73"/>
                 </a:solidFill>
@@ -13018,7 +13018,7 @@
               </a:spcAft>
             </a:pPr>
             <a:r>
-              <a:rPr sz="1200" b="1">
+              <a:rPr sz="1439" b="1">
                 <a:solidFill>
                   <a:srgbClr val="5B6B73"/>
                 </a:solidFill>
@@ -13080,7 +13080,7 @@
               </a:spcAft>
             </a:pPr>
             <a:r>
-              <a:rPr sz="1200" b="1">
+              <a:rPr sz="1439" b="1">
                 <a:solidFill>
                   <a:srgbClr val="5B6B73"/>
                 </a:solidFill>
@@ -13099,7 +13099,7 @@
               </a:spcAft>
             </a:pPr>
             <a:r>
-              <a:rPr sz="1200" b="1">
+              <a:rPr sz="1439" b="1">
                 <a:solidFill>
                   <a:srgbClr val="5B6B73"/>
                 </a:solidFill>
@@ -13161,7 +13161,7 @@
               </a:spcAft>
             </a:pPr>
             <a:r>
-              <a:rPr sz="1200" b="1">
+              <a:rPr sz="1439" b="1">
                 <a:solidFill>
                   <a:srgbClr val="5B6B73"/>
                 </a:solidFill>
@@ -13180,7 +13180,7 @@
               </a:spcAft>
             </a:pPr>
             <a:r>
-              <a:rPr sz="1200" b="1">
+              <a:rPr sz="1439" b="1">
                 <a:solidFill>
                   <a:srgbClr val="5B6B73"/>
                 </a:solidFill>
@@ -13248,7 +13248,7 @@
               </a:spcAft>
             </a:pPr>
             <a:r>
-              <a:rPr sz="1200" b="1">
+              <a:rPr sz="1439" b="1">
                 <a:solidFill>
                   <a:srgbClr val="FFFFFF"/>
                 </a:solidFill>
@@ -13267,7 +13267,7 @@
               </a:spcAft>
             </a:pPr>
             <a:r>
-              <a:rPr sz="1200" b="1">
+              <a:rPr sz="1439" b="1">
                 <a:solidFill>
                   <a:srgbClr val="FFFFFF"/>
                 </a:solidFill>
@@ -13329,7 +13329,7 @@
               </a:spcAft>
             </a:pPr>
             <a:r>
-              <a:rPr sz="1200" b="1">
+              <a:rPr sz="1439" b="1">
                 <a:solidFill>
                   <a:srgbClr val="5B6B73"/>
                 </a:solidFill>
@@ -13348,7 +13348,7 @@
               </a:spcAft>
             </a:pPr>
             <a:r>
-              <a:rPr sz="1200" b="1">
+              <a:rPr sz="1439" b="1">
                 <a:solidFill>
                   <a:srgbClr val="5B6B73"/>
                 </a:solidFill>
@@ -13393,7 +13393,7 @@
               </a:spcAft>
             </a:pPr>
             <a:r>
-              <a:rPr sz="1700" b="0" i="0">
+              <a:rPr sz="2039" b="0" i="0">
                 <a:solidFill>
                   <a:srgbClr val="212A33"/>
                 </a:solidFill>
@@ -13402,7 +13402,7 @@
               <a:t>At the </a:t>
             </a:r>
             <a:r>
-              <a:rPr sz="1700" b="1" i="0">
+              <a:rPr sz="2039" b="1" i="0">
                 <a:solidFill>
                   <a:srgbClr val="C99A2E"/>
                 </a:solidFill>
@@ -13411,7 +13411,7 @@
               <a:t>data analysis stage</a:t>
             </a:r>
             <a:r>
-              <a:rPr sz="1700" b="0" i="0">
+              <a:rPr sz="2039" b="0" i="0">
                 <a:solidFill>
                   <a:srgbClr val="212A33"/>
                 </a:solidFill>
@@ -13456,7 +13456,7 @@
               </a:spcAft>
             </a:pPr>
             <a:r>
-              <a:rPr sz="1600" b="1">
+              <a:rPr sz="1920" b="1">
                 <a:solidFill>
                   <a:srgbClr val="C99A2E"/>
                 </a:solidFill>
@@ -13465,7 +13465,7 @@
               <a:t>•  </a:t>
             </a:r>
             <a:r>
-              <a:rPr sz="1600" b="0" i="0">
+              <a:rPr sz="1920" b="0" i="0">
                 <a:solidFill>
                   <a:srgbClr val="212A33"/>
                 </a:solidFill>
@@ -13474,7 +13474,7 @@
               <a:t>Avoiding </a:t>
             </a:r>
             <a:r>
-              <a:rPr sz="1600" b="1" i="0">
+              <a:rPr sz="1920" b="1" i="0">
                 <a:solidFill>
                   <a:srgbClr val="212A33"/>
                 </a:solidFill>
@@ -13483,7 +13483,7 @@
               <a:t>taking sides</a:t>
             </a:r>
             <a:r>
-              <a:rPr sz="1600" b="0" i="0">
+              <a:rPr sz="1920" b="0" i="0">
                 <a:solidFill>
                   <a:srgbClr val="212A33"/>
                 </a:solidFill>
@@ -13492,7 +13492,7 @@
               <a:t> — not favoring results that make participants or the researcher look good </a:t>
             </a:r>
             <a:r>
-              <a:rPr sz="1600" b="0" i="1">
+              <a:rPr sz="1920" b="0" i="1">
                 <a:solidFill>
                   <a:srgbClr val="5B6B73"/>
                 </a:solidFill>
@@ -13514,7 +13514,7 @@
               </a:spcAft>
             </a:pPr>
             <a:r>
-              <a:rPr sz="1600" b="1">
+              <a:rPr sz="1920" b="1">
                 <a:solidFill>
                   <a:srgbClr val="C99A2E"/>
                 </a:solidFill>
@@ -13523,7 +13523,7 @@
               <a:t>•  </a:t>
             </a:r>
             <a:r>
-              <a:rPr sz="1600" b="0" i="0">
+              <a:rPr sz="1920" b="0" i="0">
                 <a:solidFill>
                   <a:srgbClr val="212A33"/>
                 </a:solidFill>
@@ -13532,7 +13532,7 @@
               <a:t>Reporting the </a:t>
             </a:r>
             <a:r>
-              <a:rPr sz="1600" b="1" i="0">
+              <a:rPr sz="1920" b="1" i="0">
                 <a:solidFill>
                   <a:srgbClr val="212A33"/>
                 </a:solidFill>
@@ -13541,7 +13541,7 @@
               <a:t>full range</a:t>
             </a:r>
             <a:r>
-              <a:rPr sz="1600" b="0" i="0">
+              <a:rPr sz="1920" b="0" i="0">
                 <a:solidFill>
                   <a:srgbClr val="212A33"/>
                 </a:solidFill>
@@ -13684,7 +13684,7 @@
               </a:spcAft>
             </a:pPr>
             <a:r>
-              <a:rPr sz="1250" b="1" i="0">
+              <a:rPr sz="1500" b="1" i="0">
                 <a:solidFill>
                   <a:srgbClr val="C99A2E"/>
                 </a:solidFill>
@@ -13706,7 +13706,7 @@
               </a:spcAft>
             </a:pPr>
             <a:r>
-              <a:rPr sz="1450" b="0" i="0">
+              <a:rPr sz="1739" b="0" i="0">
                 <a:solidFill>
                   <a:srgbClr val="212A33"/>
                 </a:solidFill>
@@ -13901,7 +13901,7 @@
               </a:spcAft>
             </a:pPr>
             <a:r>
-              <a:rPr sz="1250" b="1" i="0">
+              <a:rPr sz="1500" b="1" i="0">
                 <a:solidFill>
                   <a:srgbClr val="C99A2E"/>
                 </a:solidFill>
@@ -13920,8 +13920,8 @@
         </p:nvSpPr>
         <p:spPr>
           <a:xfrm>
-            <a:off x="640080" y="822960"/>
-            <a:ext cx="10424160" cy="1005840"/>
+            <a:off x="640080" y="786384"/>
+            <a:ext cx="11064240" cy="914400"/>
           </a:xfrm>
           <a:prstGeom prst="rect">
             <a:avLst/>
@@ -13946,7 +13946,7 @@
               </a:spcAft>
             </a:pPr>
             <a:r>
-              <a:rPr sz="3200" b="1" i="0">
+              <a:rPr sz="3500" b="1" i="0">
                 <a:solidFill>
                   <a:srgbClr val="212A33"/>
                 </a:solidFill>
@@ -13966,7 +13966,7 @@
         <p:spPr>
           <a:xfrm>
             <a:off x="658368" y="1572768"/>
-            <a:ext cx="1371600" cy="54864"/>
+            <a:ext cx="1463040" cy="64008"/>
           </a:xfrm>
           <a:prstGeom prst="rect">
             <a:avLst/>
@@ -14035,7 +14035,7 @@
               </a:spcAft>
             </a:pPr>
             <a:r>
-              <a:rPr sz="1200" b="1" i="0">
+              <a:rPr sz="1439" b="1" i="0">
                 <a:solidFill>
                   <a:srgbClr val="5B6B73"/>
                 </a:solidFill>
@@ -14080,7 +14080,7 @@
               </a:spcAft>
             </a:pPr>
             <a:r>
-              <a:rPr sz="1000" b="0" i="0">
+              <a:rPr sz="1200" b="0" i="0">
                 <a:solidFill>
                   <a:srgbClr val="5B6B73"/>
                 </a:solidFill>
@@ -14142,7 +14142,7 @@
               </a:spcAft>
             </a:pPr>
             <a:r>
-              <a:rPr sz="1200" b="1">
+              <a:rPr sz="1439" b="1">
                 <a:solidFill>
                   <a:srgbClr val="5B6B73"/>
                 </a:solidFill>
@@ -14204,7 +14204,7 @@
               </a:spcAft>
             </a:pPr>
             <a:r>
-              <a:rPr sz="1200" b="1">
+              <a:rPr sz="1439" b="1">
                 <a:solidFill>
                   <a:srgbClr val="5B6B73"/>
                 </a:solidFill>
@@ -14223,7 +14223,7 @@
               </a:spcAft>
             </a:pPr>
             <a:r>
-              <a:rPr sz="1200" b="1">
+              <a:rPr sz="1439" b="1">
                 <a:solidFill>
                   <a:srgbClr val="5B6B73"/>
                 </a:solidFill>
@@ -14285,7 +14285,7 @@
               </a:spcAft>
             </a:pPr>
             <a:r>
-              <a:rPr sz="1200" b="1">
+              <a:rPr sz="1439" b="1">
                 <a:solidFill>
                   <a:srgbClr val="5B6B73"/>
                 </a:solidFill>
@@ -14304,7 +14304,7 @@
               </a:spcAft>
             </a:pPr>
             <a:r>
-              <a:rPr sz="1200" b="1">
+              <a:rPr sz="1439" b="1">
                 <a:solidFill>
                   <a:srgbClr val="5B6B73"/>
                 </a:solidFill>
@@ -14366,7 +14366,7 @@
               </a:spcAft>
             </a:pPr>
             <a:r>
-              <a:rPr sz="1200" b="1">
+              <a:rPr sz="1439" b="1">
                 <a:solidFill>
                   <a:srgbClr val="5B6B73"/>
                 </a:solidFill>
@@ -14385,7 +14385,7 @@
               </a:spcAft>
             </a:pPr>
             <a:r>
-              <a:rPr sz="1200" b="1">
+              <a:rPr sz="1439" b="1">
                 <a:solidFill>
                   <a:srgbClr val="5B6B73"/>
                 </a:solidFill>
@@ -14453,7 +14453,7 @@
               </a:spcAft>
             </a:pPr>
             <a:r>
-              <a:rPr sz="1200" b="1">
+              <a:rPr sz="1439" b="1">
                 <a:solidFill>
                   <a:srgbClr val="FFFFFF"/>
                 </a:solidFill>
@@ -14472,7 +14472,7 @@
               </a:spcAft>
             </a:pPr>
             <a:r>
-              <a:rPr sz="1200" b="1">
+              <a:rPr sz="1439" b="1">
                 <a:solidFill>
                   <a:srgbClr val="FFFFFF"/>
                 </a:solidFill>
@@ -14517,7 +14517,7 @@
               </a:spcAft>
             </a:pPr>
             <a:r>
-              <a:rPr sz="1700" b="0" i="0">
+              <a:rPr sz="2039" b="0" i="0">
                 <a:solidFill>
                   <a:srgbClr val="212A33"/>
                 </a:solidFill>
@@ -14526,7 +14526,7 @@
               <a:t>At the </a:t>
             </a:r>
             <a:r>
-              <a:rPr sz="1700" b="1" i="0">
+              <a:rPr sz="2039" b="1" i="0">
                 <a:solidFill>
                   <a:srgbClr val="C99A2E"/>
                 </a:solidFill>
@@ -14535,7 +14535,7 @@
               <a:t>reporting stage</a:t>
             </a:r>
             <a:r>
-              <a:rPr sz="1700" b="0" i="0">
+              <a:rPr sz="2039" b="0" i="0">
                 <a:solidFill>
                   <a:srgbClr val="212A33"/>
                 </a:solidFill>
@@ -14580,7 +14580,7 @@
               </a:spcAft>
             </a:pPr>
             <a:r>
-              <a:rPr sz="1650" b="1">
+              <a:rPr sz="1980" b="1">
                 <a:solidFill>
                   <a:srgbClr val="C99A2E"/>
                 </a:solidFill>
@@ -14589,7 +14589,7 @@
               <a:t>•  </a:t>
             </a:r>
             <a:r>
-              <a:rPr sz="1650" b="0" i="0">
+              <a:rPr sz="1980" b="0" i="0">
                 <a:solidFill>
                   <a:srgbClr val="212A33"/>
                 </a:solidFill>
@@ -14611,7 +14611,7 @@
               </a:spcAft>
             </a:pPr>
             <a:r>
-              <a:rPr sz="1650" b="1">
+              <a:rPr sz="1980" b="1">
                 <a:solidFill>
                   <a:srgbClr val="C99A2E"/>
                 </a:solidFill>
@@ -14620,7 +14620,7 @@
               <a:t>•  </a:t>
             </a:r>
             <a:r>
-              <a:rPr sz="1650" b="0" i="0">
+              <a:rPr sz="1980" b="0" i="0">
                 <a:solidFill>
                   <a:srgbClr val="212A33"/>
                 </a:solidFill>
@@ -14629,7 +14629,7 @@
               <a:t>Giving proper </a:t>
             </a:r>
             <a:r>
-              <a:rPr sz="1650" b="1" i="0">
+              <a:rPr sz="1980" b="1" i="0">
                 <a:solidFill>
                   <a:srgbClr val="212A33"/>
                 </a:solidFill>
@@ -14638,7 +14638,7 @@
               <a:t>credit</a:t>
             </a:r>
             <a:r>
-              <a:rPr sz="1650" b="0" i="0">
+              <a:rPr sz="1980" b="0" i="0">
                 <a:solidFill>
                   <a:srgbClr val="212A33"/>
                 </a:solidFill>
@@ -14647,7 +14647,7 @@
               <a:t> to the ideas and words of others </a:t>
             </a:r>
             <a:r>
-              <a:rPr sz="1650" b="0" i="1">
+              <a:rPr sz="1980" b="0" i="1">
                 <a:solidFill>
                   <a:srgbClr val="5B6B73"/>
                 </a:solidFill>
@@ -14744,7 +14744,7 @@
               </a:spcAft>
             </a:pPr>
             <a:r>
-              <a:rPr sz="1800" b="1" i="0">
+              <a:rPr sz="2160" b="1" i="0">
                 <a:solidFill>
                   <a:srgbClr val="FFFFFF"/>
                 </a:solidFill>
@@ -14766,7 +14766,7 @@
               </a:spcAft>
             </a:pPr>
             <a:r>
-              <a:rPr sz="1600" b="0" i="1">
+              <a:rPr sz="1920" b="0" i="1">
                 <a:solidFill>
                   <a:srgbClr val="FFE6DD"/>
                 </a:solidFill>
@@ -15005,7 +15005,7 @@
               </a:spcAft>
             </a:pPr>
             <a:r>
-              <a:rPr sz="1250" b="1" i="0">
+              <a:rPr sz="1500" b="1" i="0">
                 <a:solidFill>
                   <a:srgbClr val="C99A2E"/>
                 </a:solidFill>
@@ -15024,8 +15024,8 @@
         </p:nvSpPr>
         <p:spPr>
           <a:xfrm>
-            <a:off x="640080" y="822960"/>
-            <a:ext cx="10424160" cy="1005840"/>
+            <a:off x="640080" y="786384"/>
+            <a:ext cx="11064240" cy="914400"/>
           </a:xfrm>
           <a:prstGeom prst="rect">
             <a:avLst/>
@@ -15050,7 +15050,7 @@
               </a:spcAft>
             </a:pPr>
             <a:r>
-              <a:rPr sz="3200" b="1" i="0">
+              <a:rPr sz="3500" b="1" i="0">
                 <a:solidFill>
                   <a:srgbClr val="212A33"/>
                 </a:solidFill>
@@ -15070,7 +15070,7 @@
         <p:spPr>
           <a:xfrm>
             <a:off x="658368" y="1572768"/>
-            <a:ext cx="1371600" cy="54864"/>
+            <a:ext cx="1463040" cy="64008"/>
           </a:xfrm>
           <a:prstGeom prst="rect">
             <a:avLst/>
@@ -15139,7 +15139,7 @@
               </a:spcAft>
             </a:pPr>
             <a:r>
-              <a:rPr sz="1200" b="1" i="0">
+              <a:rPr sz="1439" b="1" i="0">
                 <a:solidFill>
                   <a:srgbClr val="5B6B73"/>
                 </a:solidFill>
@@ -15184,7 +15184,7 @@
               </a:spcAft>
             </a:pPr>
             <a:r>
-              <a:rPr sz="1000" b="0" i="0">
+              <a:rPr sz="1200" b="0" i="0">
                 <a:solidFill>
                   <a:srgbClr val="5B6B73"/>
                 </a:solidFill>
@@ -15204,7 +15204,7 @@
         <p:spPr>
           <a:xfrm>
             <a:off x="640080" y="1737360"/>
-            <a:ext cx="1234440" cy="384048"/>
+            <a:ext cx="1463040" cy="420624"/>
           </a:xfrm>
           <a:prstGeom prst="roundRect">
             <a:avLst>
@@ -15239,7 +15239,7 @@
           <a:p>
             <a:pPr algn="ctr"/>
             <a:r>
-              <a:rPr sz="1250" b="1">
+              <a:rPr sz="1500" b="1">
                 <a:solidFill>
                   <a:srgbClr val="FFFFFF"/>
                 </a:solidFill>
@@ -15258,8 +15258,8 @@
         </p:nvSpPr>
         <p:spPr>
           <a:xfrm>
-            <a:off x="2057400" y="1764792"/>
-            <a:ext cx="9509760" cy="548640"/>
+            <a:off x="2331720" y="1709928"/>
+            <a:ext cx="9144000" cy="658368"/>
           </a:xfrm>
           <a:prstGeom prst="rect">
             <a:avLst/>
@@ -15284,7 +15284,7 @@
               </a:spcAft>
             </a:pPr>
             <a:r>
-              <a:rPr sz="1450" b="0" i="0">
+              <a:rPr sz="1739" b="0" i="0">
                 <a:solidFill>
                   <a:srgbClr val="212A33"/>
                 </a:solidFill>
@@ -15346,7 +15346,7 @@
               </a:spcAft>
             </a:pPr>
             <a:r>
-              <a:rPr sz="1200" b="1">
+              <a:rPr sz="1439" b="1">
                 <a:solidFill>
                   <a:srgbClr val="5B6B73"/>
                 </a:solidFill>
@@ -15408,7 +15408,7 @@
               </a:spcAft>
             </a:pPr>
             <a:r>
-              <a:rPr sz="1200" b="1">
+              <a:rPr sz="1439" b="1">
                 <a:solidFill>
                   <a:srgbClr val="5B6B73"/>
                 </a:solidFill>
@@ -15427,7 +15427,7 @@
               </a:spcAft>
             </a:pPr>
             <a:r>
-              <a:rPr sz="1200" b="1">
+              <a:rPr sz="1439" b="1">
                 <a:solidFill>
                   <a:srgbClr val="5B6B73"/>
                 </a:solidFill>
@@ -15489,7 +15489,7 @@
               </a:spcAft>
             </a:pPr>
             <a:r>
-              <a:rPr sz="1200" b="1">
+              <a:rPr sz="1439" b="1">
                 <a:solidFill>
                   <a:srgbClr val="5B6B73"/>
                 </a:solidFill>
@@ -15508,7 +15508,7 @@
               </a:spcAft>
             </a:pPr>
             <a:r>
-              <a:rPr sz="1200" b="1">
+              <a:rPr sz="1439" b="1">
                 <a:solidFill>
                   <a:srgbClr val="5B6B73"/>
                 </a:solidFill>
@@ -15570,7 +15570,7 @@
               </a:spcAft>
             </a:pPr>
             <a:r>
-              <a:rPr sz="1200" b="1">
+              <a:rPr sz="1439" b="1">
                 <a:solidFill>
                   <a:srgbClr val="5B6B73"/>
                 </a:solidFill>
@@ -15589,7 +15589,7 @@
               </a:spcAft>
             </a:pPr>
             <a:r>
-              <a:rPr sz="1200" b="1">
+              <a:rPr sz="1439" b="1">
                 <a:solidFill>
                   <a:srgbClr val="5B6B73"/>
                 </a:solidFill>
@@ -15651,7 +15651,7 @@
               </a:spcAft>
             </a:pPr>
             <a:r>
-              <a:rPr sz="1200" b="1">
+              <a:rPr sz="1439" b="1">
                 <a:solidFill>
                   <a:srgbClr val="5B6B73"/>
                 </a:solidFill>
@@ -15670,7 +15670,7 @@
               </a:spcAft>
             </a:pPr>
             <a:r>
-              <a:rPr sz="1200" b="1">
+              <a:rPr sz="1439" b="1">
                 <a:solidFill>
                   <a:srgbClr val="5B6B73"/>
                 </a:solidFill>
@@ -15813,7 +15813,7 @@
               </a:spcAft>
             </a:pPr>
             <a:r>
-              <a:rPr sz="1600" b="1" i="0">
+              <a:rPr sz="1920" b="1" i="0">
                 <a:solidFill>
                   <a:srgbClr val="FFFFFF"/>
                 </a:solidFill>
@@ -15858,7 +15858,7 @@
               </a:spcAft>
             </a:pPr>
             <a:r>
-              <a:rPr sz="1300" b="0" i="0">
+              <a:rPr sz="1560" b="0" i="0">
                 <a:solidFill>
                   <a:srgbClr val="212A33"/>
                 </a:solidFill>
@@ -16001,7 +16001,7 @@
               </a:spcAft>
             </a:pPr>
             <a:r>
-              <a:rPr sz="1600" b="1" i="0">
+              <a:rPr sz="1920" b="1" i="0">
                 <a:solidFill>
                   <a:srgbClr val="FFFFFF"/>
                 </a:solidFill>
@@ -16046,7 +16046,7 @@
               </a:spcAft>
             </a:pPr>
             <a:r>
-              <a:rPr sz="1300" b="0" i="0">
+              <a:rPr sz="1560" b="0" i="0">
                 <a:solidFill>
                   <a:srgbClr val="212A33"/>
                 </a:solidFill>
@@ -16189,7 +16189,7 @@
               </a:spcAft>
             </a:pPr>
             <a:r>
-              <a:rPr sz="1600" b="1" i="0">
+              <a:rPr sz="1920" b="1" i="0">
                 <a:solidFill>
                   <a:srgbClr val="FFFFFF"/>
                 </a:solidFill>
@@ -16234,7 +16234,7 @@
               </a:spcAft>
             </a:pPr>
             <a:r>
-              <a:rPr sz="1300" b="0" i="0">
+              <a:rPr sz="1560" b="0" i="0">
                 <a:solidFill>
                   <a:srgbClr val="212A33"/>
                 </a:solidFill>
@@ -16377,7 +16377,7 @@
               </a:spcAft>
             </a:pPr>
             <a:r>
-              <a:rPr sz="1600" b="1" i="0">
+              <a:rPr sz="1920" b="1" i="0">
                 <a:solidFill>
                   <a:srgbClr val="FFFFFF"/>
                 </a:solidFill>
@@ -16422,7 +16422,7 @@
               </a:spcAft>
             </a:pPr>
             <a:r>
-              <a:rPr sz="1300" b="0" i="0">
+              <a:rPr sz="1560" b="0" i="0">
                 <a:solidFill>
                   <a:srgbClr val="212A33"/>
                 </a:solidFill>
@@ -16467,7 +16467,7 @@
               </a:spcAft>
             </a:pPr>
             <a:r>
-              <a:rPr sz="1400" b="0" i="1">
+              <a:rPr sz="1680" b="0" i="1">
                 <a:solidFill>
                   <a:srgbClr val="5B6B73"/>
                 </a:solidFill>
@@ -16662,7 +16662,7 @@
               </a:spcAft>
             </a:pPr>
             <a:r>
-              <a:rPr sz="1250" b="1" i="0">
+              <a:rPr sz="1500" b="1" i="0">
                 <a:solidFill>
                   <a:srgbClr val="E76F51"/>
                 </a:solidFill>
@@ -16681,8 +16681,8 @@
         </p:nvSpPr>
         <p:spPr>
           <a:xfrm>
-            <a:off x="640080" y="822960"/>
-            <a:ext cx="10424160" cy="1005840"/>
+            <a:off x="640080" y="786384"/>
+            <a:ext cx="11064240" cy="914400"/>
           </a:xfrm>
           <a:prstGeom prst="rect">
             <a:avLst/>
@@ -16707,7 +16707,7 @@
               </a:spcAft>
             </a:pPr>
             <a:r>
-              <a:rPr sz="3200" b="1" i="0">
+              <a:rPr sz="3500" b="1" i="0">
                 <a:solidFill>
                   <a:srgbClr val="212A33"/>
                 </a:solidFill>
@@ -16727,7 +16727,7 @@
         <p:spPr>
           <a:xfrm>
             <a:off x="658368" y="1572768"/>
-            <a:ext cx="1371600" cy="54864"/>
+            <a:ext cx="1463040" cy="64008"/>
           </a:xfrm>
           <a:prstGeom prst="rect">
             <a:avLst/>
@@ -16796,7 +16796,7 @@
               </a:spcAft>
             </a:pPr>
             <a:r>
-              <a:rPr sz="1200" b="1" i="0">
+              <a:rPr sz="1439" b="1" i="0">
                 <a:solidFill>
                   <a:srgbClr val="5B6B73"/>
                 </a:solidFill>
@@ -16841,7 +16841,7 @@
               </a:spcAft>
             </a:pPr>
             <a:r>
-              <a:rPr sz="1000" b="0" i="0">
+              <a:rPr sz="1200" b="0" i="0">
                 <a:solidFill>
                   <a:srgbClr val="5B6B73"/>
                 </a:solidFill>
@@ -16938,7 +16938,7 @@
               </a:spcAft>
             </a:pPr>
             <a:r>
-              <a:rPr sz="2100" b="1" i="0">
+              <a:rPr sz="2520" b="1" i="0">
                 <a:solidFill>
                   <a:srgbClr val="FFFFFF"/>
                 </a:solidFill>
@@ -16947,7 +16947,7 @@
               <a:t>Plagiarism</a:t>
             </a:r>
             <a:r>
-              <a:rPr sz="1750" b="0" i="0">
+              <a:rPr sz="2100" b="0" i="0">
                 <a:solidFill>
                   <a:srgbClr val="FFFFFF"/>
                 </a:solidFill>
@@ -16956,7 +16956,7 @@
               <a:t>  —  presenting someone else's work, ideas, or words as your own, without giving them credit </a:t>
             </a:r>
             <a:r>
-              <a:rPr sz="1500" b="0" i="1">
+              <a:rPr sz="1800" b="0" i="1">
                 <a:solidFill>
                   <a:srgbClr val="FFE6DD"/>
                 </a:solidFill>
@@ -16965,7 +16965,7 @@
               <a:t>(Creswell &amp; Creswell, 2023)</a:t>
             </a:r>
             <a:r>
-              <a:rPr sz="1750" b="0" i="0">
+              <a:rPr sz="2100" b="0" i="0">
                 <a:solidFill>
                   <a:srgbClr val="FFFFFF"/>
                 </a:solidFill>
@@ -17010,7 +17010,7 @@
               </a:spcAft>
             </a:pPr>
             <a:r>
-              <a:rPr sz="1700" b="0" i="0">
+              <a:rPr sz="2039" b="0" i="0">
                 <a:solidFill>
                   <a:srgbClr val="212A33"/>
                 </a:solidFill>
@@ -17019,7 +17019,7 @@
               <a:t>Plagiarism is not just a </a:t>
             </a:r>
             <a:r>
-              <a:rPr sz="1700" b="0" i="1">
+              <a:rPr sz="2039" b="0" i="1">
                 <a:solidFill>
                   <a:srgbClr val="212A33"/>
                 </a:solidFill>
@@ -17028,7 +17028,7 @@
               <a:t>rule</a:t>
             </a:r>
             <a:r>
-              <a:rPr sz="1700" b="0" i="0">
+              <a:rPr sz="2039" b="0" i="0">
                 <a:solidFill>
                   <a:srgbClr val="212A33"/>
                 </a:solidFill>
@@ -17037,7 +17037,7 @@
               <a:t> — it's an </a:t>
             </a:r>
             <a:r>
-              <a:rPr sz="1700" b="1" i="0">
+              <a:rPr sz="2039" b="1" i="0">
                 <a:solidFill>
                   <a:srgbClr val="E76F51"/>
                 </a:solidFill>
@@ -17046,7 +17046,7 @@
               <a:t>ethics violation</a:t>
             </a:r>
             <a:r>
-              <a:rPr sz="1700" b="0" i="0">
+              <a:rPr sz="2039" b="0" i="0">
                 <a:solidFill>
                   <a:srgbClr val="212A33"/>
                 </a:solidFill>
@@ -17189,7 +17189,7 @@
               </a:spcAft>
             </a:pPr>
             <a:r>
-              <a:rPr sz="1250" b="1" i="0">
+              <a:rPr sz="1500" b="1" i="0">
                 <a:solidFill>
                   <a:srgbClr val="E76F51"/>
                 </a:solidFill>
@@ -17211,7 +17211,7 @@
               </a:spcAft>
             </a:pPr>
             <a:r>
-              <a:rPr sz="1450" b="0" i="0">
+              <a:rPr sz="1739" b="0" i="0">
                 <a:solidFill>
                   <a:srgbClr val="212A33"/>
                 </a:solidFill>
@@ -17406,7 +17406,7 @@
               </a:spcAft>
             </a:pPr>
             <a:r>
-              <a:rPr sz="1250" b="1" i="0">
+              <a:rPr sz="1500" b="1" i="0">
                 <a:solidFill>
                   <a:srgbClr val="0F4C5C"/>
                 </a:solidFill>
@@ -17425,8 +17425,8 @@
         </p:nvSpPr>
         <p:spPr>
           <a:xfrm>
-            <a:off x="640080" y="822960"/>
-            <a:ext cx="10424160" cy="1005840"/>
+            <a:off x="640080" y="786384"/>
+            <a:ext cx="11064240" cy="914400"/>
           </a:xfrm>
           <a:prstGeom prst="rect">
             <a:avLst/>
@@ -17451,7 +17451,7 @@
               </a:spcAft>
             </a:pPr>
             <a:r>
-              <a:rPr sz="3200" b="1" i="0">
+              <a:rPr sz="3500" b="1" i="0">
                 <a:solidFill>
                   <a:srgbClr val="212A33"/>
                 </a:solidFill>
@@ -17471,7 +17471,7 @@
         <p:spPr>
           <a:xfrm>
             <a:off x="658368" y="1572768"/>
-            <a:ext cx="1371600" cy="54864"/>
+            <a:ext cx="1463040" cy="64008"/>
           </a:xfrm>
           <a:prstGeom prst="rect">
             <a:avLst/>
@@ -17540,7 +17540,7 @@
               </a:spcAft>
             </a:pPr>
             <a:r>
-              <a:rPr sz="1200" b="1" i="0">
+              <a:rPr sz="1439" b="1" i="0">
                 <a:solidFill>
                   <a:srgbClr val="5B6B73"/>
                 </a:solidFill>
@@ -17585,7 +17585,7 @@
               </a:spcAft>
             </a:pPr>
             <a:r>
-              <a:rPr sz="1000" b="0" i="0">
+              <a:rPr sz="1200" b="0" i="0">
                 <a:solidFill>
                   <a:srgbClr val="5B6B73"/>
                 </a:solidFill>
@@ -17605,7 +17605,7 @@
         <p:spPr>
           <a:xfrm>
             <a:off x="640080" y="1828800"/>
-            <a:ext cx="5486400" cy="2743200"/>
+            <a:ext cx="5532120" cy="4206240"/>
           </a:xfrm>
           <a:prstGeom prst="rect">
             <a:avLst/>
@@ -17630,7 +17630,7 @@
               </a:spcAft>
             </a:pPr>
             <a:r>
-              <a:rPr sz="1900" b="1" i="0">
+              <a:rPr sz="2280" b="1" i="0">
                 <a:solidFill>
                   <a:srgbClr val="0F4C5C"/>
                 </a:solidFill>
@@ -17652,7 +17652,7 @@
               </a:spcAft>
             </a:pPr>
             <a:r>
-              <a:rPr sz="1550" b="0" i="0">
+              <a:rPr sz="1859" b="0" i="0">
                 <a:solidFill>
                   <a:srgbClr val="212A33"/>
                 </a:solidFill>
@@ -17661,7 +17661,7 @@
               <a:t>A single recurring case study runs across the whole lecture, so research ethics and citation feel like a </a:t>
             </a:r>
             <a:r>
-              <a:rPr sz="1550" b="1" i="1">
+              <a:rPr sz="1859" b="1" i="1">
                 <a:solidFill>
                   <a:srgbClr val="212A33"/>
                 </a:solidFill>
@@ -17670,7 +17670,7 @@
               <a:t>connected story</a:t>
             </a:r>
             <a:r>
-              <a:rPr sz="1550" b="0" i="0">
+              <a:rPr sz="1859" b="0" i="0">
                 <a:solidFill>
                   <a:srgbClr val="212A33"/>
                 </a:solidFill>
@@ -17692,7 +17692,7 @@
               </a:spcAft>
             </a:pPr>
             <a:r>
-              <a:rPr sz="1900" b="1" i="0">
+              <a:rPr sz="2280" b="1" i="0">
                 <a:solidFill>
                   <a:srgbClr val="0F4C5C"/>
                 </a:solidFill>
@@ -17714,7 +17714,7 @@
               </a:spcAft>
             </a:pPr>
             <a:r>
-              <a:rPr sz="1550" b="0" i="0">
+              <a:rPr sz="1859" b="0" i="0">
                 <a:solidFill>
                   <a:srgbClr val="212A33"/>
                 </a:solidFill>
@@ -17723,7 +17723,7 @@
               <a:t>Textbook material is drawn from </a:t>
             </a:r>
             <a:r>
-              <a:rPr sz="1550" b="0" i="1">
+              <a:rPr sz="1859" b="0" i="1">
                 <a:solidFill>
                   <a:srgbClr val="212A33"/>
                 </a:solidFill>
@@ -17732,7 +17732,7 @@
               <a:t>Creswell &amp; Creswell (2023), Research Design, Ch. 4</a:t>
             </a:r>
             <a:r>
-              <a:rPr sz="1550" b="0" i="0">
+              <a:rPr sz="1859" b="0" i="0">
                 <a:solidFill>
                   <a:srgbClr val="212A33"/>
                 </a:solidFill>
@@ -17741,7 +17741,7 @@
               <a:t> — the “Ethical Issues” section and Table 4.1. Examples not from the textbook are labeled </a:t>
             </a:r>
             <a:r>
-              <a:rPr sz="1550" b="1" i="0">
+              <a:rPr sz="1859" b="1" i="0">
                 <a:solidFill>
                   <a:srgbClr val="212A33"/>
                 </a:solidFill>
@@ -17750,7 +17750,7 @@
               <a:t>Instructor-Created Example</a:t>
             </a:r>
             <a:r>
-              <a:rPr sz="1550" b="0" i="0">
+              <a:rPr sz="1859" b="0" i="0">
                 <a:solidFill>
                   <a:srgbClr val="212A33"/>
                 </a:solidFill>
@@ -17893,7 +17893,7 @@
               </a:spcAft>
             </a:pPr>
             <a:r>
-              <a:rPr sz="1300" b="1" i="0">
+              <a:rPr sz="1560" b="1" i="0">
                 <a:solidFill>
                   <a:srgbClr val="FFFFFF"/>
                 </a:solidFill>
@@ -17938,7 +17938,7 @@
               </a:spcAft>
             </a:pPr>
             <a:r>
-              <a:rPr sz="1700" b="1" i="0">
+              <a:rPr sz="2039" b="1" i="0">
                 <a:solidFill>
                   <a:srgbClr val="0F4C5C"/>
                 </a:solidFill>
@@ -17960,7 +17960,7 @@
               </a:spcAft>
             </a:pPr>
             <a:r>
-              <a:rPr sz="1200" b="0" i="1">
+              <a:rPr sz="1439" b="0" i="1">
                 <a:solidFill>
                   <a:srgbClr val="5B6B73"/>
                 </a:solidFill>
@@ -17982,7 +17982,7 @@
               </a:spcAft>
             </a:pPr>
             <a:r>
-              <a:rPr sz="1350" b="0" i="0">
+              <a:rPr sz="1620" b="0" i="0">
                 <a:solidFill>
                   <a:srgbClr val="212A33"/>
                 </a:solidFill>
@@ -18177,7 +18177,7 @@
               </a:spcAft>
             </a:pPr>
             <a:r>
-              <a:rPr sz="1250" b="1" i="0">
+              <a:rPr sz="1500" b="1" i="0">
                 <a:solidFill>
                   <a:srgbClr val="E76F51"/>
                 </a:solidFill>
@@ -18196,8 +18196,8 @@
         </p:nvSpPr>
         <p:spPr>
           <a:xfrm>
-            <a:off x="640080" y="822960"/>
-            <a:ext cx="10424160" cy="1005840"/>
+            <a:off x="640080" y="786384"/>
+            <a:ext cx="11064240" cy="914400"/>
           </a:xfrm>
           <a:prstGeom prst="rect">
             <a:avLst/>
@@ -18222,7 +18222,7 @@
               </a:spcAft>
             </a:pPr>
             <a:r>
-              <a:rPr sz="3200" b="1" i="0">
+              <a:rPr sz="3500" b="1" i="0">
                 <a:solidFill>
                   <a:srgbClr val="212A33"/>
                 </a:solidFill>
@@ -18242,7 +18242,7 @@
         <p:spPr>
           <a:xfrm>
             <a:off x="658368" y="1572768"/>
-            <a:ext cx="1371600" cy="54864"/>
+            <a:ext cx="1463040" cy="64008"/>
           </a:xfrm>
           <a:prstGeom prst="rect">
             <a:avLst/>
@@ -18311,7 +18311,7 @@
               </a:spcAft>
             </a:pPr>
             <a:r>
-              <a:rPr sz="1200" b="1" i="0">
+              <a:rPr sz="1439" b="1" i="0">
                 <a:solidFill>
                   <a:srgbClr val="5B6B73"/>
                 </a:solidFill>
@@ -18356,7 +18356,7 @@
               </a:spcAft>
             </a:pPr>
             <a:r>
-              <a:rPr sz="1000" b="0" i="0">
+              <a:rPr sz="1200" b="0" i="0">
                 <a:solidFill>
                   <a:srgbClr val="5B6B73"/>
                 </a:solidFill>
@@ -18499,7 +18499,7 @@
               </a:spcAft>
             </a:pPr>
             <a:r>
-              <a:rPr sz="1900" b="1" i="0">
+              <a:rPr sz="2280" b="1" i="0">
                 <a:solidFill>
                   <a:srgbClr val="FFFFFF"/>
                 </a:solidFill>
@@ -18544,7 +18544,7 @@
               </a:spcAft>
             </a:pPr>
             <a:r>
-              <a:rPr sz="1600" b="0" i="0">
+              <a:rPr sz="1920" b="0" i="0">
                 <a:solidFill>
                   <a:srgbClr val="212A33"/>
                 </a:solidFill>
@@ -18633,7 +18633,7 @@
               </a:spcAft>
             </a:pPr>
             <a:r>
-              <a:rPr sz="1400" b="1" i="1">
+              <a:rPr sz="1680" b="1" i="1">
                 <a:solidFill>
                   <a:srgbClr val="E76F51"/>
                 </a:solidFill>
@@ -18776,7 +18776,7 @@
               </a:spcAft>
             </a:pPr>
             <a:r>
-              <a:rPr sz="1900" b="1" i="0">
+              <a:rPr sz="2280" b="1" i="0">
                 <a:solidFill>
                   <a:srgbClr val="FFFFFF"/>
                 </a:solidFill>
@@ -18821,7 +18821,7 @@
               </a:spcAft>
             </a:pPr>
             <a:r>
-              <a:rPr sz="1600" b="0" i="0">
+              <a:rPr sz="1920" b="0" i="0">
                 <a:solidFill>
                   <a:srgbClr val="212A33"/>
                 </a:solidFill>
@@ -18910,7 +18910,7 @@
               </a:spcAft>
             </a:pPr>
             <a:r>
-              <a:rPr sz="1400" b="1" i="1">
+              <a:rPr sz="1680" b="1" i="1">
                 <a:solidFill>
                   <a:srgbClr val="C05338"/>
                 </a:solidFill>
@@ -19105,7 +19105,7 @@
               </a:spcAft>
             </a:pPr>
             <a:r>
-              <a:rPr sz="1250" b="1" i="0">
+              <a:rPr sz="1500" b="1" i="0">
                 <a:solidFill>
                   <a:srgbClr val="E76F51"/>
                 </a:solidFill>
@@ -19124,8 +19124,8 @@
         </p:nvSpPr>
         <p:spPr>
           <a:xfrm>
-            <a:off x="640080" y="822960"/>
-            <a:ext cx="10424160" cy="1005840"/>
+            <a:off x="640080" y="786384"/>
+            <a:ext cx="11064240" cy="914400"/>
           </a:xfrm>
           <a:prstGeom prst="rect">
             <a:avLst/>
@@ -19150,7 +19150,7 @@
               </a:spcAft>
             </a:pPr>
             <a:r>
-              <a:rPr sz="3200" b="1" i="0">
+              <a:rPr sz="3500" b="1" i="0">
                 <a:solidFill>
                   <a:srgbClr val="212A33"/>
                 </a:solidFill>
@@ -19170,7 +19170,7 @@
         <p:spPr>
           <a:xfrm>
             <a:off x="658368" y="1572768"/>
-            <a:ext cx="1371600" cy="54864"/>
+            <a:ext cx="1463040" cy="64008"/>
           </a:xfrm>
           <a:prstGeom prst="rect">
             <a:avLst/>
@@ -19239,7 +19239,7 @@
               </a:spcAft>
             </a:pPr>
             <a:r>
-              <a:rPr sz="1200" b="1" i="0">
+              <a:rPr sz="1439" b="1" i="0">
                 <a:solidFill>
                   <a:srgbClr val="5B6B73"/>
                 </a:solidFill>
@@ -19284,7 +19284,7 @@
               </a:spcAft>
             </a:pPr>
             <a:r>
-              <a:rPr sz="1000" b="0" i="0">
+              <a:rPr sz="1200" b="0" i="0">
                 <a:solidFill>
                   <a:srgbClr val="5B6B73"/>
                 </a:solidFill>
@@ -19329,7 +19329,7 @@
               </a:spcAft>
             </a:pPr>
             <a:r>
-              <a:rPr sz="1700" b="0" i="0">
+              <a:rPr sz="2039" b="0" i="0">
                 <a:solidFill>
                   <a:srgbClr val="212A33"/>
                 </a:solidFill>
@@ -19424,7 +19424,7 @@
               </a:spcAft>
             </a:pPr>
             <a:r>
-              <a:rPr sz="2000" b="1" i="0">
+              <a:rPr sz="2400" b="1" i="0">
                 <a:solidFill>
                   <a:srgbClr val="FFFFFF"/>
                 </a:solidFill>
@@ -19647,7 +19647,7 @@
               </a:spcAft>
             </a:pPr>
             <a:r>
-              <a:rPr sz="1700" b="1" i="0">
+              <a:rPr sz="2039" b="1" i="0">
                 <a:solidFill>
                   <a:srgbClr val="FFFFFF"/>
                 </a:solidFill>
@@ -19692,7 +19692,7 @@
               </a:spcAft>
             </a:pPr>
             <a:r>
-              <a:rPr sz="1600" b="1" i="0">
+              <a:rPr sz="1920" b="1" i="0">
                 <a:solidFill>
                   <a:srgbClr val="2A9D8F"/>
                 </a:solidFill>
@@ -19701,7 +19701,7 @@
               <a:t>Giving credit</a:t>
             </a:r>
             <a:r>
-              <a:rPr sz="1400" b="0" i="0">
+              <a:rPr sz="1680" b="0" i="0">
                 <a:solidFill>
                   <a:srgbClr val="212A33"/>
                 </a:solidFill>
@@ -19924,7 +19924,7 @@
               </a:spcAft>
             </a:pPr>
             <a:r>
-              <a:rPr sz="1700" b="1" i="0">
+              <a:rPr sz="2039" b="1" i="0">
                 <a:solidFill>
                   <a:srgbClr val="FFFFFF"/>
                 </a:solidFill>
@@ -19969,7 +19969,7 @@
               </a:spcAft>
             </a:pPr>
             <a:r>
-              <a:rPr sz="1600" b="1" i="0">
+              <a:rPr sz="1920" b="1" i="0">
                 <a:solidFill>
                   <a:srgbClr val="3A7CA5"/>
                 </a:solidFill>
@@ -19978,7 +19978,7 @@
               <a:t>Enabling verification</a:t>
             </a:r>
             <a:r>
-              <a:rPr sz="1400" b="0" i="0">
+              <a:rPr sz="1680" b="0" i="0">
                 <a:solidFill>
                   <a:srgbClr val="212A33"/>
                 </a:solidFill>
@@ -20201,7 +20201,7 @@
               </a:spcAft>
             </a:pPr>
             <a:r>
-              <a:rPr sz="1700" b="1" i="0">
+              <a:rPr sz="2039" b="1" i="0">
                 <a:solidFill>
                   <a:srgbClr val="FFFFFF"/>
                 </a:solidFill>
@@ -20246,7 +20246,7 @@
               </a:spcAft>
             </a:pPr>
             <a:r>
-              <a:rPr sz="1600" b="1" i="0">
+              <a:rPr sz="1920" b="1" i="0">
                 <a:solidFill>
                   <a:srgbClr val="6A4C93"/>
                 </a:solidFill>
@@ -20255,7 +20255,7 @@
               <a:t>Joining the conversation</a:t>
             </a:r>
             <a:r>
-              <a:rPr sz="1400" b="0" i="0">
+              <a:rPr sz="1680" b="0" i="0">
                 <a:solidFill>
                   <a:srgbClr val="212A33"/>
                 </a:solidFill>
@@ -20300,7 +20300,7 @@
               </a:spcAft>
             </a:pPr>
             <a:r>
-              <a:rPr sz="1500" b="1" i="1">
+              <a:rPr sz="1800" b="1" i="1">
                 <a:solidFill>
                   <a:srgbClr val="E76F51"/>
                 </a:solidFill>
@@ -20495,7 +20495,7 @@
               </a:spcAft>
             </a:pPr>
             <a:r>
-              <a:rPr sz="1250" b="1" i="0">
+              <a:rPr sz="1500" b="1" i="0">
                 <a:solidFill>
                   <a:srgbClr val="E76F51"/>
                 </a:solidFill>
@@ -20514,8 +20514,8 @@
         </p:nvSpPr>
         <p:spPr>
           <a:xfrm>
-            <a:off x="640080" y="822960"/>
-            <a:ext cx="10424160" cy="1005840"/>
+            <a:off x="640080" y="786384"/>
+            <a:ext cx="11064240" cy="914400"/>
           </a:xfrm>
           <a:prstGeom prst="rect">
             <a:avLst/>
@@ -20540,7 +20540,7 @@
               </a:spcAft>
             </a:pPr>
             <a:r>
-              <a:rPr sz="3200" b="1" i="0">
+              <a:rPr sz="3500" b="1" i="0">
                 <a:solidFill>
                   <a:srgbClr val="212A33"/>
                 </a:solidFill>
@@ -20560,7 +20560,7 @@
         <p:spPr>
           <a:xfrm>
             <a:off x="658368" y="1572768"/>
-            <a:ext cx="1371600" cy="54864"/>
+            <a:ext cx="1463040" cy="64008"/>
           </a:xfrm>
           <a:prstGeom prst="rect">
             <a:avLst/>
@@ -20629,7 +20629,7 @@
               </a:spcAft>
             </a:pPr>
             <a:r>
-              <a:rPr sz="1200" b="1" i="0">
+              <a:rPr sz="1439" b="1" i="0">
                 <a:solidFill>
                   <a:srgbClr val="5B6B73"/>
                 </a:solidFill>
@@ -20674,7 +20674,7 @@
               </a:spcAft>
             </a:pPr>
             <a:r>
-              <a:rPr sz="1000" b="0" i="0">
+              <a:rPr sz="1200" b="0" i="0">
                 <a:solidFill>
                   <a:srgbClr val="5B6B73"/>
                 </a:solidFill>
@@ -20694,7 +20694,7 @@
         <p:spPr>
           <a:xfrm>
             <a:off x="640080" y="1783080"/>
-            <a:ext cx="1234440" cy="384048"/>
+            <a:ext cx="1463040" cy="420624"/>
           </a:xfrm>
           <a:prstGeom prst="roundRect">
             <a:avLst>
@@ -20729,7 +20729,7 @@
           <a:p>
             <a:pPr algn="ctr"/>
             <a:r>
-              <a:rPr sz="1250" b="1">
+              <a:rPr sz="1500" b="1">
                 <a:solidFill>
                   <a:srgbClr val="FFFFFF"/>
                 </a:solidFill>
@@ -20748,8 +20748,8 @@
         </p:nvSpPr>
         <p:spPr>
           <a:xfrm>
-            <a:off x="2057400" y="1810512"/>
-            <a:ext cx="9144000" cy="411480"/>
+            <a:off x="2331720" y="1810512"/>
+            <a:ext cx="9144000" cy="457200"/>
           </a:xfrm>
           <a:prstGeom prst="rect">
             <a:avLst/>
@@ -20774,7 +20774,7 @@
               </a:spcAft>
             </a:pPr>
             <a:r>
-              <a:rPr sz="1600" b="1" i="0">
+              <a:rPr sz="1920" b="1" i="0">
                 <a:solidFill>
                   <a:srgbClr val="E76F51"/>
                 </a:solidFill>
@@ -20917,7 +20917,7 @@
               </a:spcAft>
             </a:pPr>
             <a:r>
-              <a:rPr sz="1800" b="1" i="0">
+              <a:rPr sz="2160" b="1" i="0">
                 <a:solidFill>
                   <a:srgbClr val="FFFFFF"/>
                 </a:solidFill>
@@ -20962,7 +20962,7 @@
               </a:spcAft>
             </a:pPr>
             <a:r>
-              <a:rPr sz="1500" b="0" i="1">
+              <a:rPr sz="1800" b="0" i="1">
                 <a:solidFill>
                   <a:srgbClr val="212A33"/>
                 </a:solidFill>
@@ -21053,7 +21053,7 @@
               </a:spcAft>
             </a:pPr>
             <a:r>
-              <a:rPr sz="1200" b="1" i="0">
+              <a:rPr sz="1439" b="1" i="0">
                 <a:solidFill>
                   <a:srgbClr val="FFFFFF"/>
                 </a:solidFill>
@@ -21196,7 +21196,7 @@
               </a:spcAft>
             </a:pPr>
             <a:r>
-              <a:rPr sz="1800" b="1" i="0">
+              <a:rPr sz="2160" b="1" i="0">
                 <a:solidFill>
                   <a:srgbClr val="FFFFFF"/>
                 </a:solidFill>
@@ -21241,7 +21241,7 @@
               </a:spcAft>
             </a:pPr>
             <a:r>
-              <a:rPr sz="1500" b="0" i="1">
+              <a:rPr sz="1800" b="0" i="1">
                 <a:solidFill>
                   <a:srgbClr val="212A33"/>
                 </a:solidFill>
@@ -21332,7 +21332,7 @@
               </a:spcAft>
             </a:pPr>
             <a:r>
-              <a:rPr sz="1200" b="1" i="0">
+              <a:rPr sz="1439" b="1" i="0">
                 <a:solidFill>
                   <a:srgbClr val="FFFFFF"/>
                 </a:solidFill>
@@ -21377,7 +21377,7 @@
               </a:spcAft>
             </a:pPr>
             <a:r>
-              <a:rPr sz="1500" b="0" i="1">
+              <a:rPr sz="1800" b="0" i="1">
                 <a:solidFill>
                   <a:srgbClr val="5B6B73"/>
                 </a:solidFill>
@@ -21572,7 +21572,7 @@
               </a:spcAft>
             </a:pPr>
             <a:r>
-              <a:rPr sz="1250" b="1" i="0">
+              <a:rPr sz="1500" b="1" i="0">
                 <a:solidFill>
                   <a:srgbClr val="6A4C93"/>
                 </a:solidFill>
@@ -21591,8 +21591,8 @@
         </p:nvSpPr>
         <p:spPr>
           <a:xfrm>
-            <a:off x="640080" y="822960"/>
-            <a:ext cx="10424160" cy="1005840"/>
+            <a:off x="640080" y="786384"/>
+            <a:ext cx="11064240" cy="914400"/>
           </a:xfrm>
           <a:prstGeom prst="rect">
             <a:avLst/>
@@ -21617,7 +21617,7 @@
               </a:spcAft>
             </a:pPr>
             <a:r>
-              <a:rPr sz="3200" b="1" i="0">
+              <a:rPr sz="3500" b="1" i="0">
                 <a:solidFill>
                   <a:srgbClr val="212A33"/>
                 </a:solidFill>
@@ -21637,7 +21637,7 @@
         <p:spPr>
           <a:xfrm>
             <a:off x="658368" y="1572768"/>
-            <a:ext cx="1371600" cy="54864"/>
+            <a:ext cx="1463040" cy="64008"/>
           </a:xfrm>
           <a:prstGeom prst="rect">
             <a:avLst/>
@@ -21706,7 +21706,7 @@
               </a:spcAft>
             </a:pPr>
             <a:r>
-              <a:rPr sz="1200" b="1" i="0">
+              <a:rPr sz="1439" b="1" i="0">
                 <a:solidFill>
                   <a:srgbClr val="5B6B73"/>
                 </a:solidFill>
@@ -21751,7 +21751,7 @@
               </a:spcAft>
             </a:pPr>
             <a:r>
-              <a:rPr sz="1000" b="0" i="0">
+              <a:rPr sz="1200" b="0" i="0">
                 <a:solidFill>
                   <a:srgbClr val="5B6B73"/>
                 </a:solidFill>
@@ -21796,7 +21796,7 @@
               </a:spcAft>
             </a:pPr>
             <a:r>
-              <a:rPr sz="1700" b="0" i="0">
+              <a:rPr sz="2039" b="0" i="0">
                 <a:solidFill>
                   <a:srgbClr val="212A33"/>
                 </a:solidFill>
@@ -21805,7 +21805,7 @@
               <a:t>Every complete citation has </a:t>
             </a:r>
             <a:r>
-              <a:rPr sz="1700" b="1" i="0">
+              <a:rPr sz="2039" b="1" i="0">
                 <a:solidFill>
                   <a:srgbClr val="6A4C93"/>
                 </a:solidFill>
@@ -21814,7 +21814,7 @@
               <a:t>two connected parts</a:t>
             </a:r>
             <a:r>
-              <a:rPr sz="1700" b="0" i="0">
+              <a:rPr sz="2039" b="0" i="0">
                 <a:solidFill>
                   <a:srgbClr val="212A33"/>
                 </a:solidFill>
@@ -21957,7 +21957,7 @@
               </a:spcAft>
             </a:pPr>
             <a:r>
-              <a:rPr sz="1800" b="1" i="0">
+              <a:rPr sz="2160" b="1" i="0">
                 <a:solidFill>
                   <a:srgbClr val="FFFFFF"/>
                 </a:solidFill>
@@ -22002,7 +22002,7 @@
               </a:spcAft>
             </a:pPr>
             <a:r>
-              <a:rPr sz="1500" b="0" i="0">
+              <a:rPr sz="1800" b="0" i="0">
                 <a:solidFill>
                   <a:srgbClr val="212A33"/>
                 </a:solidFill>
@@ -22093,7 +22093,7 @@
               </a:spcAft>
             </a:pPr>
             <a:r>
-              <a:rPr sz="1200" b="1" i="0">
+              <a:rPr sz="1439" b="1" i="0">
                 <a:solidFill>
                   <a:srgbClr val="5B6B73"/>
                 </a:solidFill>
@@ -22102,7 +22102,7 @@
               <a:t>Example:  </a:t>
             </a:r>
             <a:r>
-              <a:rPr sz="1350" b="1" i="0">
+              <a:rPr sz="1620" b="1" i="0">
                 <a:solidFill>
                   <a:srgbClr val="6A4C93"/>
                 </a:solidFill>
@@ -22245,7 +22245,7 @@
               </a:spcAft>
             </a:pPr>
             <a:r>
-              <a:rPr sz="1800" b="1" i="0">
+              <a:rPr sz="2160" b="1" i="0">
                 <a:solidFill>
                   <a:srgbClr val="FFFFFF"/>
                 </a:solidFill>
@@ -22290,7 +22290,7 @@
               </a:spcAft>
             </a:pPr>
             <a:r>
-              <a:rPr sz="1500" b="0" i="0">
+              <a:rPr sz="1800" b="0" i="0">
                 <a:solidFill>
                   <a:srgbClr val="212A33"/>
                 </a:solidFill>
@@ -22381,7 +22381,7 @@
               </a:spcAft>
             </a:pPr>
             <a:r>
-              <a:rPr sz="1200" b="1" i="0">
+              <a:rPr sz="1439" b="1" i="0">
                 <a:solidFill>
                   <a:srgbClr val="5B6B73"/>
                 </a:solidFill>
@@ -22390,7 +22390,7 @@
               <a:t>Example:  </a:t>
             </a:r>
             <a:r>
-              <a:rPr sz="1350" b="1" i="0">
+              <a:rPr sz="1620" b="1" i="0">
                 <a:solidFill>
                   <a:srgbClr val="3A7CA5"/>
                 </a:solidFill>
@@ -22479,7 +22479,7 @@
               </a:spcAft>
             </a:pPr>
             <a:r>
-              <a:rPr sz="1550" b="1" i="1">
+              <a:rPr sz="1859" b="1" i="1">
                 <a:solidFill>
                   <a:srgbClr val="6A4C93"/>
                 </a:solidFill>
@@ -22674,7 +22674,7 @@
               </a:spcAft>
             </a:pPr>
             <a:r>
-              <a:rPr sz="1250" b="1" i="0">
+              <a:rPr sz="1500" b="1" i="0">
                 <a:solidFill>
                   <a:srgbClr val="6A4C93"/>
                 </a:solidFill>
@@ -22693,8 +22693,8 @@
         </p:nvSpPr>
         <p:spPr>
           <a:xfrm>
-            <a:off x="640080" y="822960"/>
-            <a:ext cx="10424160" cy="1005840"/>
+            <a:off x="640080" y="786384"/>
+            <a:ext cx="11064240" cy="914400"/>
           </a:xfrm>
           <a:prstGeom prst="rect">
             <a:avLst/>
@@ -22719,7 +22719,7 @@
               </a:spcAft>
             </a:pPr>
             <a:r>
-              <a:rPr sz="3200" b="1" i="0">
+              <a:rPr sz="3500" b="1" i="0">
                 <a:solidFill>
                   <a:srgbClr val="212A33"/>
                 </a:solidFill>
@@ -22739,7 +22739,7 @@
         <p:spPr>
           <a:xfrm>
             <a:off x="658368" y="1572768"/>
-            <a:ext cx="1371600" cy="54864"/>
+            <a:ext cx="1463040" cy="64008"/>
           </a:xfrm>
           <a:prstGeom prst="rect">
             <a:avLst/>
@@ -22808,7 +22808,7 @@
               </a:spcAft>
             </a:pPr>
             <a:r>
-              <a:rPr sz="1200" b="1" i="0">
+              <a:rPr sz="1439" b="1" i="0">
                 <a:solidFill>
                   <a:srgbClr val="5B6B73"/>
                 </a:solidFill>
@@ -22853,7 +22853,7 @@
               </a:spcAft>
             </a:pPr>
             <a:r>
-              <a:rPr sz="1000" b="0" i="0">
+              <a:rPr sz="1200" b="0" i="0">
                 <a:solidFill>
                   <a:srgbClr val="5B6B73"/>
                 </a:solidFill>
@@ -22898,7 +22898,7 @@
               </a:spcAft>
             </a:pPr>
             <a:r>
-              <a:rPr sz="1700" b="0" i="0">
+              <a:rPr sz="2039" b="0" i="0">
                 <a:solidFill>
                   <a:srgbClr val="212A33"/>
                 </a:solidFill>
@@ -22907,7 +22907,7 @@
               <a:t>This course uses </a:t>
             </a:r>
             <a:r>
-              <a:rPr sz="1700" b="1" i="0">
+              <a:rPr sz="2039" b="1" i="0">
                 <a:solidFill>
                   <a:srgbClr val="6A4C93"/>
                 </a:solidFill>
@@ -22916,7 +22916,7 @@
               <a:t>APA (American Psychological Association) style</a:t>
             </a:r>
             <a:r>
-              <a:rPr sz="1700" b="0" i="0">
+              <a:rPr sz="2039" b="0" i="0">
                 <a:solidFill>
                   <a:srgbClr val="212A33"/>
                 </a:solidFill>
@@ -23007,7 +23007,7 @@
               </a:spcAft>
             </a:pPr>
             <a:r>
-              <a:rPr sz="1500" b="1" i="0">
+              <a:rPr sz="1800" b="1" i="0">
                 <a:solidFill>
                   <a:srgbClr val="212A33"/>
                 </a:solidFill>
@@ -23016,7 +23016,7 @@
               <a:t>APA in-text citation format:   </a:t>
             </a:r>
             <a:r>
-              <a:rPr sz="1700" b="1" i="1">
+              <a:rPr sz="2039" b="1" i="1">
                 <a:solidFill>
                   <a:srgbClr val="6A4C93"/>
                 </a:solidFill>
@@ -23057,7 +23057,7 @@
                     <a:p>
                       <a:pPr algn="l"/>
                       <a:r>
-                        <a:rPr sz="1550" b="1" i="0">
+                        <a:rPr sz="1859" b="1" i="0">
                           <a:solidFill>
                             <a:srgbClr val="FFFFFF"/>
                           </a:solidFill>
@@ -23080,7 +23080,7 @@
                     <a:p>
                       <a:pPr algn="l"/>
                       <a:r>
-                        <a:rPr sz="1550" b="1" i="0">
+                        <a:rPr sz="1859" b="1" i="0">
                           <a:solidFill>
                             <a:srgbClr val="FFFFFF"/>
                           </a:solidFill>
@@ -23105,7 +23105,7 @@
                     <a:p>
                       <a:pPr algn="l"/>
                       <a:r>
-                        <a:rPr sz="1500" b="0" i="0">
+                        <a:rPr sz="1800" b="0" i="0">
                           <a:solidFill>
                             <a:srgbClr val="212A33"/>
                           </a:solidFill>
@@ -23128,7 +23128,7 @@
                     <a:p>
                       <a:pPr algn="l"/>
                       <a:r>
-                        <a:rPr sz="1500" b="0" i="0">
+                        <a:rPr sz="1800" b="0" i="0">
                           <a:solidFill>
                             <a:srgbClr val="212A33"/>
                           </a:solidFill>
@@ -23153,7 +23153,7 @@
                     <a:p>
                       <a:pPr algn="l"/>
                       <a:r>
-                        <a:rPr sz="1500" b="0" i="0">
+                        <a:rPr sz="1800" b="0" i="0">
                           <a:solidFill>
                             <a:srgbClr val="212A33"/>
                           </a:solidFill>
@@ -23162,7 +23162,7 @@
                         <a:t>Direct quote </a:t>
                       </a:r>
                       <a:r>
-                        <a:rPr sz="1300" b="0" i="1">
+                        <a:rPr sz="1560" b="0" i="1">
                           <a:solidFill>
                             <a:srgbClr val="212A33"/>
                           </a:solidFill>
@@ -23185,7 +23185,7 @@
                     <a:p>
                       <a:pPr algn="l"/>
                       <a:r>
-                        <a:rPr sz="1500" b="0" i="0">
+                        <a:rPr sz="1800" b="0" i="0">
                           <a:solidFill>
                             <a:srgbClr val="212A33"/>
                           </a:solidFill>
@@ -23194,7 +23194,7 @@
                         <a:t>Reyes (2022) found the design </a:t>
                       </a:r>
                       <a:r>
-                        <a:rPr sz="1500" b="0" i="1">
+                        <a:rPr sz="1800" b="0" i="1">
                           <a:solidFill>
                             <a:srgbClr val="212A33"/>
                           </a:solidFill>
@@ -23203,7 +23203,7 @@
                         <a:t>“reduced bacterial presence by over 60%”</a:t>
                       </a:r>
                       <a:r>
-                        <a:rPr sz="1500" b="0" i="0">
+                        <a:rPr sz="1800" b="0" i="0">
                           <a:solidFill>
                             <a:srgbClr val="212A33"/>
                           </a:solidFill>
@@ -23408,7 +23408,7 @@
               </a:spcAft>
             </a:pPr>
             <a:r>
-              <a:rPr sz="1250" b="1" i="0">
+              <a:rPr sz="1500" b="1" i="0">
                 <a:solidFill>
                   <a:srgbClr val="6A4C93"/>
                 </a:solidFill>
@@ -23427,8 +23427,8 @@
         </p:nvSpPr>
         <p:spPr>
           <a:xfrm>
-            <a:off x="640080" y="822960"/>
-            <a:ext cx="10424160" cy="1005840"/>
+            <a:off x="640080" y="786384"/>
+            <a:ext cx="11064240" cy="914400"/>
           </a:xfrm>
           <a:prstGeom prst="rect">
             <a:avLst/>
@@ -23453,7 +23453,7 @@
               </a:spcAft>
             </a:pPr>
             <a:r>
-              <a:rPr sz="3200" b="1" i="0">
+              <a:rPr sz="3500" b="1" i="0">
                 <a:solidFill>
                   <a:srgbClr val="212A33"/>
                 </a:solidFill>
@@ -23473,7 +23473,7 @@
         <p:spPr>
           <a:xfrm>
             <a:off x="658368" y="1572768"/>
-            <a:ext cx="1371600" cy="54864"/>
+            <a:ext cx="1463040" cy="64008"/>
           </a:xfrm>
           <a:prstGeom prst="rect">
             <a:avLst/>
@@ -23542,7 +23542,7 @@
               </a:spcAft>
             </a:pPr>
             <a:r>
-              <a:rPr sz="1200" b="1" i="0">
+              <a:rPr sz="1439" b="1" i="0">
                 <a:solidFill>
                   <a:srgbClr val="5B6B73"/>
                 </a:solidFill>
@@ -23587,7 +23587,7 @@
               </a:spcAft>
             </a:pPr>
             <a:r>
-              <a:rPr sz="1000" b="0" i="0">
+              <a:rPr sz="1200" b="0" i="0">
                 <a:solidFill>
                   <a:srgbClr val="5B6B73"/>
                 </a:solidFill>
@@ -23607,7 +23607,7 @@
         <p:spPr>
           <a:xfrm>
             <a:off x="640080" y="1783080"/>
-            <a:ext cx="1234440" cy="384048"/>
+            <a:ext cx="1463040" cy="420624"/>
           </a:xfrm>
           <a:prstGeom prst="roundRect">
             <a:avLst>
@@ -23642,7 +23642,7 @@
           <a:p>
             <a:pPr algn="ctr"/>
             <a:r>
-              <a:rPr sz="1250" b="1">
+              <a:rPr sz="1500" b="1">
                 <a:solidFill>
                   <a:srgbClr val="FFFFFF"/>
                 </a:solidFill>
@@ -23661,8 +23661,8 @@
         </p:nvSpPr>
         <p:spPr>
           <a:xfrm>
-            <a:off x="2057400" y="1810512"/>
-            <a:ext cx="9326880" cy="411480"/>
+            <a:off x="2331720" y="1810512"/>
+            <a:ext cx="9144000" cy="457200"/>
           </a:xfrm>
           <a:prstGeom prst="rect">
             <a:avLst/>
@@ -23687,7 +23687,7 @@
               </a:spcAft>
             </a:pPr>
             <a:r>
-              <a:rPr sz="1550" b="1" i="0">
+              <a:rPr sz="1859" b="1" i="0">
                 <a:solidFill>
                   <a:srgbClr val="6A4C93"/>
                 </a:solidFill>
@@ -23830,7 +23830,7 @@
               </a:spcAft>
             </a:pPr>
             <a:r>
-              <a:rPr sz="1800" b="1" i="0">
+              <a:rPr sz="2160" b="1" i="0">
                 <a:solidFill>
                   <a:srgbClr val="FFFFFF"/>
                 </a:solidFill>
@@ -23875,7 +23875,7 @@
               </a:spcAft>
             </a:pPr>
             <a:r>
-              <a:rPr sz="1600" b="0" i="0">
+              <a:rPr sz="1920" b="0" i="0">
                 <a:solidFill>
                   <a:srgbClr val="212A33"/>
                 </a:solidFill>
@@ -23897,7 +23897,7 @@
               </a:spcAft>
             </a:pPr>
             <a:r>
-              <a:rPr sz="1350" b="0" i="1">
+              <a:rPr sz="1620" b="0" i="1">
                 <a:solidFill>
                   <a:srgbClr val="6A4C93"/>
                 </a:solidFill>
@@ -24040,7 +24040,7 @@
               </a:spcAft>
             </a:pPr>
             <a:r>
-              <a:rPr sz="1800" b="1" i="0">
+              <a:rPr sz="2160" b="1" i="0">
                 <a:solidFill>
                   <a:srgbClr val="FFFFFF"/>
                 </a:solidFill>
@@ -24085,7 +24085,7 @@
               </a:spcAft>
             </a:pPr>
             <a:r>
-              <a:rPr sz="1600" b="0" i="0">
+              <a:rPr sz="1920" b="0" i="0">
                 <a:solidFill>
                   <a:srgbClr val="212A33"/>
                 </a:solidFill>
@@ -24094,7 +24094,7 @@
               <a:t>Dela Cruz's 2021 report stated the filter </a:t>
             </a:r>
             <a:r>
-              <a:rPr sz="1600" b="0" i="1">
+              <a:rPr sz="1920" b="0" i="1">
                 <a:solidFill>
                   <a:srgbClr val="212A33"/>
                 </a:solidFill>
@@ -24116,7 +24116,7 @@
               </a:spcAft>
             </a:pPr>
             <a:r>
-              <a:rPr sz="1350" b="0" i="1">
+              <a:rPr sz="1620" b="0" i="1">
                 <a:solidFill>
                   <a:srgbClr val="6A4C93"/>
                 </a:solidFill>
@@ -24311,7 +24311,7 @@
               </a:spcAft>
             </a:pPr>
             <a:r>
-              <a:rPr sz="1250" b="1" i="0">
+              <a:rPr sz="1500" b="1" i="0">
                 <a:solidFill>
                   <a:srgbClr val="6A4C93"/>
                 </a:solidFill>
@@ -24330,8 +24330,8 @@
         </p:nvSpPr>
         <p:spPr>
           <a:xfrm>
-            <a:off x="640080" y="822960"/>
-            <a:ext cx="10424160" cy="1005840"/>
+            <a:off x="640080" y="786384"/>
+            <a:ext cx="11064240" cy="914400"/>
           </a:xfrm>
           <a:prstGeom prst="rect">
             <a:avLst/>
@@ -24356,7 +24356,7 @@
               </a:spcAft>
             </a:pPr>
             <a:r>
-              <a:rPr sz="3200" b="1" i="0">
+              <a:rPr sz="3500" b="1" i="0">
                 <a:solidFill>
                   <a:srgbClr val="212A33"/>
                 </a:solidFill>
@@ -24376,7 +24376,7 @@
         <p:spPr>
           <a:xfrm>
             <a:off x="658368" y="1572768"/>
-            <a:ext cx="1371600" cy="54864"/>
+            <a:ext cx="1463040" cy="64008"/>
           </a:xfrm>
           <a:prstGeom prst="rect">
             <a:avLst/>
@@ -24445,7 +24445,7 @@
               </a:spcAft>
             </a:pPr>
             <a:r>
-              <a:rPr sz="1200" b="1" i="0">
+              <a:rPr sz="1439" b="1" i="0">
                 <a:solidFill>
                   <a:srgbClr val="5B6B73"/>
                 </a:solidFill>
@@ -24490,7 +24490,7 @@
               </a:spcAft>
             </a:pPr>
             <a:r>
-              <a:rPr sz="1000" b="0" i="0">
+              <a:rPr sz="1200" b="0" i="0">
                 <a:solidFill>
                   <a:srgbClr val="5B6B73"/>
                 </a:solidFill>
@@ -24535,7 +24535,7 @@
               </a:spcAft>
             </a:pPr>
             <a:r>
-              <a:rPr sz="1700" b="0" i="0">
+              <a:rPr sz="2039" b="0" i="0">
                 <a:solidFill>
                   <a:srgbClr val="212A33"/>
                 </a:solidFill>
@@ -24544,7 +24544,7 @@
               <a:t>Every source type has a specific </a:t>
             </a:r>
             <a:r>
-              <a:rPr sz="1700" b="1" i="0">
+              <a:rPr sz="2039" b="1" i="0">
                 <a:solidFill>
                   <a:srgbClr val="6A4C93"/>
                 </a:solidFill>
@@ -24553,7 +24553,7 @@
               <a:t>reference list</a:t>
             </a:r>
             <a:r>
-              <a:rPr sz="1700" b="0" i="0">
+              <a:rPr sz="2039" b="0" i="0">
                 <a:solidFill>
                   <a:srgbClr val="212A33"/>
                 </a:solidFill>
@@ -24784,7 +24784,7 @@
               </a:spcAft>
             </a:pPr>
             <a:r>
-              <a:rPr sz="1800" b="1" i="0">
+              <a:rPr sz="2160" b="1" i="0">
                 <a:solidFill>
                   <a:srgbClr val="2A9D8F"/>
                 </a:solidFill>
@@ -24875,7 +24875,7 @@
               </a:spcAft>
             </a:pPr>
             <a:r>
-              <a:rPr sz="1250" b="0" i="0">
+              <a:rPr sz="1500" b="0" i="0">
                 <a:solidFill>
                   <a:srgbClr val="212A33"/>
                 </a:solidFill>
@@ -25062,7 +25062,7 @@
               </a:spcAft>
             </a:pPr>
             <a:r>
-              <a:rPr sz="1800" b="1" i="0">
+              <a:rPr sz="2160" b="1" i="0">
                 <a:solidFill>
                   <a:srgbClr val="3A7CA5"/>
                 </a:solidFill>
@@ -25153,7 +25153,7 @@
               </a:spcAft>
             </a:pPr>
             <a:r>
-              <a:rPr sz="1250" b="0" i="0">
+              <a:rPr sz="1500" b="0" i="0">
                 <a:solidFill>
                   <a:srgbClr val="212A33"/>
                 </a:solidFill>
@@ -25340,7 +25340,7 @@
               </a:spcAft>
             </a:pPr>
             <a:r>
-              <a:rPr sz="1800" b="1" i="0">
+              <a:rPr sz="2160" b="1" i="0">
                 <a:solidFill>
                   <a:srgbClr val="6A4C93"/>
                 </a:solidFill>
@@ -25431,7 +25431,7 @@
               </a:spcAft>
             </a:pPr>
             <a:r>
-              <a:rPr sz="1250" b="0" i="0">
+              <a:rPr sz="1500" b="0" i="0">
                 <a:solidFill>
                   <a:srgbClr val="212A33"/>
                 </a:solidFill>
@@ -25626,7 +25626,7 @@
               </a:spcAft>
             </a:pPr>
             <a:r>
-              <a:rPr sz="1250" b="1" i="0">
+              <a:rPr sz="1500" b="1" i="0">
                 <a:solidFill>
                   <a:srgbClr val="6A4C93"/>
                 </a:solidFill>
@@ -25645,8 +25645,8 @@
         </p:nvSpPr>
         <p:spPr>
           <a:xfrm>
-            <a:off x="640080" y="822960"/>
-            <a:ext cx="10424160" cy="1005840"/>
+            <a:off x="640080" y="786384"/>
+            <a:ext cx="11064240" cy="914400"/>
           </a:xfrm>
           <a:prstGeom prst="rect">
             <a:avLst/>
@@ -25671,7 +25671,7 @@
               </a:spcAft>
             </a:pPr>
             <a:r>
-              <a:rPr sz="3200" b="1" i="0">
+              <a:rPr sz="3500" b="1" i="0">
                 <a:solidFill>
                   <a:srgbClr val="212A33"/>
                 </a:solidFill>
@@ -25691,7 +25691,7 @@
         <p:spPr>
           <a:xfrm>
             <a:off x="658368" y="1572768"/>
-            <a:ext cx="1371600" cy="54864"/>
+            <a:ext cx="1463040" cy="64008"/>
           </a:xfrm>
           <a:prstGeom prst="rect">
             <a:avLst/>
@@ -25760,7 +25760,7 @@
               </a:spcAft>
             </a:pPr>
             <a:r>
-              <a:rPr sz="1200" b="1" i="0">
+              <a:rPr sz="1439" b="1" i="0">
                 <a:solidFill>
                   <a:srgbClr val="5B6B73"/>
                 </a:solidFill>
@@ -25805,7 +25805,7 @@
               </a:spcAft>
             </a:pPr>
             <a:r>
-              <a:rPr sz="1000" b="0" i="0">
+              <a:rPr sz="1200" b="0" i="0">
                 <a:solidFill>
                   <a:srgbClr val="5B6B73"/>
                 </a:solidFill>
@@ -25850,7 +25850,7 @@
               </a:spcAft>
             </a:pPr>
             <a:r>
-              <a:rPr sz="1350" b="0" i="1">
+              <a:rPr sz="1620" b="0" i="1">
                 <a:solidFill>
                   <a:srgbClr val="5B6B73"/>
                 </a:solidFill>
@@ -25993,7 +25993,7 @@
               </a:spcAft>
             </a:pPr>
             <a:r>
-              <a:rPr sz="1600" b="1" i="0">
+              <a:rPr sz="1920" b="1" i="0">
                 <a:solidFill>
                   <a:srgbClr val="FFFFFF"/>
                 </a:solidFill>
@@ -26038,7 +26038,7 @@
               </a:spcAft>
             </a:pPr>
             <a:r>
-              <a:rPr sz="1450" b="0" i="0">
+              <a:rPr sz="1739" b="0" i="0">
                 <a:solidFill>
                   <a:srgbClr val="212A33"/>
                 </a:solidFill>
@@ -26047,7 +26047,7 @@
               <a:t>Santos, M. R. (2020). </a:t>
             </a:r>
             <a:r>
-              <a:rPr sz="1450" b="0" i="1">
+              <a:rPr sz="1739" b="0" i="1">
                 <a:solidFill>
                   <a:srgbClr val="212A33"/>
                 </a:solidFill>
@@ -26056,7 +26056,7 @@
               <a:t>Water and community: Local solutions to global problems.</a:t>
             </a:r>
             <a:r>
-              <a:rPr sz="1450" b="0" i="0">
+              <a:rPr sz="1739" b="0" i="0">
                 <a:solidFill>
                   <a:srgbClr val="212A33"/>
                 </a:solidFill>
@@ -26199,7 +26199,7 @@
               </a:spcAft>
             </a:pPr>
             <a:r>
-              <a:rPr sz="1600" b="1" i="0">
+              <a:rPr sz="1920" b="1" i="0">
                 <a:solidFill>
                   <a:srgbClr val="FFFFFF"/>
                 </a:solidFill>
@@ -26244,7 +26244,7 @@
               </a:spcAft>
             </a:pPr>
             <a:r>
-              <a:rPr sz="1450" b="0" i="0">
+              <a:rPr sz="1739" b="0" i="0">
                 <a:solidFill>
                   <a:srgbClr val="212A33"/>
                 </a:solidFill>
@@ -26253,7 +26253,7 @@
               <a:t>Reyes, J. P. (2022). Low-cost filtration using coconut husk charcoal. </a:t>
             </a:r>
             <a:r>
-              <a:rPr sz="1450" b="0" i="1">
+              <a:rPr sz="1739" b="0" i="1">
                 <a:solidFill>
                   <a:srgbClr val="212A33"/>
                 </a:solidFill>
@@ -26262,7 +26262,7 @@
               <a:t>Philippine Journal of Environmental Engineering, 15</a:t>
             </a:r>
             <a:r>
-              <a:rPr sz="1450" b="0" i="0">
+              <a:rPr sz="1739" b="0" i="0">
                 <a:solidFill>
                   <a:srgbClr val="212A33"/>
                 </a:solidFill>
@@ -26405,7 +26405,7 @@
               </a:spcAft>
             </a:pPr>
             <a:r>
-              <a:rPr sz="1600" b="1" i="0">
+              <a:rPr sz="1920" b="1" i="0">
                 <a:solidFill>
                   <a:srgbClr val="FFFFFF"/>
                 </a:solidFill>
@@ -26450,7 +26450,7 @@
               </a:spcAft>
             </a:pPr>
             <a:r>
-              <a:rPr sz="1450" b="0" i="0">
+              <a:rPr sz="1739" b="0" i="0">
                 <a:solidFill>
                   <a:srgbClr val="212A33"/>
                 </a:solidFill>
@@ -26459,7 +26459,7 @@
               <a:t>Department of Science and Technology. (2023, March 4). </a:t>
             </a:r>
             <a:r>
-              <a:rPr sz="1450" b="0" i="1">
+              <a:rPr sz="1739" b="0" i="1">
                 <a:solidFill>
                   <a:srgbClr val="212A33"/>
                 </a:solidFill>
@@ -26468,7 +26468,7 @@
               <a:t>Community water testing guidelines.</a:t>
             </a:r>
             <a:r>
-              <a:rPr sz="1450" b="0" i="0">
+              <a:rPr sz="1739" b="0" i="0">
                 <a:solidFill>
                   <a:srgbClr val="212A33"/>
                 </a:solidFill>
@@ -26663,7 +26663,7 @@
               </a:spcAft>
             </a:pPr>
             <a:r>
-              <a:rPr sz="1250" b="1" i="0">
+              <a:rPr sz="1500" b="1" i="0">
                 <a:solidFill>
                   <a:srgbClr val="6A4C93"/>
                 </a:solidFill>
@@ -26682,8 +26682,8 @@
         </p:nvSpPr>
         <p:spPr>
           <a:xfrm>
-            <a:off x="640080" y="822960"/>
-            <a:ext cx="10424160" cy="1005840"/>
+            <a:off x="640080" y="786384"/>
+            <a:ext cx="11064240" cy="914400"/>
           </a:xfrm>
           <a:prstGeom prst="rect">
             <a:avLst/>
@@ -26708,7 +26708,7 @@
               </a:spcAft>
             </a:pPr>
             <a:r>
-              <a:rPr sz="3200" b="1" i="0">
+              <a:rPr sz="3500" b="1" i="0">
                 <a:solidFill>
                   <a:srgbClr val="212A33"/>
                 </a:solidFill>
@@ -26728,7 +26728,7 @@
         <p:spPr>
           <a:xfrm>
             <a:off x="658368" y="1572768"/>
-            <a:ext cx="1371600" cy="54864"/>
+            <a:ext cx="1463040" cy="64008"/>
           </a:xfrm>
           <a:prstGeom prst="rect">
             <a:avLst/>
@@ -26797,7 +26797,7 @@
               </a:spcAft>
             </a:pPr>
             <a:r>
-              <a:rPr sz="1200" b="1" i="0">
+              <a:rPr sz="1439" b="1" i="0">
                 <a:solidFill>
                   <a:srgbClr val="5B6B73"/>
                 </a:solidFill>
@@ -26842,7 +26842,7 @@
               </a:spcAft>
             </a:pPr>
             <a:r>
-              <a:rPr sz="1000" b="0" i="0">
+              <a:rPr sz="1200" b="0" i="0">
                 <a:solidFill>
                   <a:srgbClr val="5B6B73"/>
                 </a:solidFill>
@@ -26862,7 +26862,7 @@
         <p:spPr>
           <a:xfrm>
             <a:off x="640080" y="1783080"/>
-            <a:ext cx="1234440" cy="384048"/>
+            <a:ext cx="1463040" cy="420624"/>
           </a:xfrm>
           <a:prstGeom prst="roundRect">
             <a:avLst>
@@ -26897,7 +26897,7 @@
           <a:p>
             <a:pPr algn="ctr"/>
             <a:r>
-              <a:rPr sz="1250" b="1">
+              <a:rPr sz="1500" b="1">
                 <a:solidFill>
                   <a:srgbClr val="FFFFFF"/>
                 </a:solidFill>
@@ -26916,8 +26916,8 @@
         </p:nvSpPr>
         <p:spPr>
           <a:xfrm>
-            <a:off x="2057400" y="1810512"/>
-            <a:ext cx="9326880" cy="411480"/>
+            <a:off x="2331720" y="1810512"/>
+            <a:ext cx="9144000" cy="457200"/>
           </a:xfrm>
           <a:prstGeom prst="rect">
             <a:avLst/>
@@ -26942,7 +26942,7 @@
               </a:spcAft>
             </a:pPr>
             <a:r>
-              <a:rPr sz="1500" b="1" i="0">
+              <a:rPr sz="1800" b="1" i="0">
                 <a:solidFill>
                   <a:srgbClr val="6A4C93"/>
                 </a:solidFill>
@@ -27085,7 +27085,7 @@
               </a:spcAft>
             </a:pPr>
             <a:r>
-              <a:rPr sz="1350" b="1" i="0">
+              <a:rPr sz="1620" b="1" i="0">
                 <a:solidFill>
                   <a:srgbClr val="FFFFFF"/>
                 </a:solidFill>
@@ -27130,7 +27130,7 @@
               </a:spcAft>
             </a:pPr>
             <a:r>
-              <a:rPr sz="1450" b="1" i="0">
+              <a:rPr sz="1739" b="1" i="0">
                 <a:solidFill>
                   <a:srgbClr val="6A4C93"/>
                 </a:solidFill>
@@ -27139,7 +27139,7 @@
               <a:t>Author:  </a:t>
             </a:r>
             <a:r>
-              <a:rPr sz="1450" b="0" i="0">
+              <a:rPr sz="1739" b="0" i="0">
                 <a:solidFill>
                   <a:srgbClr val="212A33"/>
                 </a:solidFill>
@@ -27161,7 +27161,7 @@
               </a:spcAft>
             </a:pPr>
             <a:r>
-              <a:rPr sz="1450" b="1" i="0">
+              <a:rPr sz="1739" b="1" i="0">
                 <a:solidFill>
                   <a:srgbClr val="6A4C93"/>
                 </a:solidFill>
@@ -27170,7 +27170,7 @@
               <a:t>Year:  </a:t>
             </a:r>
             <a:r>
-              <a:rPr sz="1450" b="0" i="0">
+              <a:rPr sz="1739" b="0" i="0">
                 <a:solidFill>
                   <a:srgbClr val="212A33"/>
                 </a:solidFill>
@@ -27192,7 +27192,7 @@
               </a:spcAft>
             </a:pPr>
             <a:r>
-              <a:rPr sz="1450" b="1" i="0">
+              <a:rPr sz="1739" b="1" i="0">
                 <a:solidFill>
                   <a:srgbClr val="6A4C93"/>
                 </a:solidFill>
@@ -27201,7 +27201,7 @@
               <a:t>Article title:  </a:t>
             </a:r>
             <a:r>
-              <a:rPr sz="1450" b="0" i="0">
+              <a:rPr sz="1739" b="0" i="0">
                 <a:solidFill>
                   <a:srgbClr val="212A33"/>
                 </a:solidFill>
@@ -27223,7 +27223,7 @@
               </a:spcAft>
             </a:pPr>
             <a:r>
-              <a:rPr sz="1450" b="1" i="0">
+              <a:rPr sz="1739" b="1" i="0">
                 <a:solidFill>
                   <a:srgbClr val="6A4C93"/>
                 </a:solidFill>
@@ -27232,7 +27232,7 @@
               <a:t>Journal:  </a:t>
             </a:r>
             <a:r>
-              <a:rPr sz="1450" b="0" i="1">
+              <a:rPr sz="1739" b="0" i="1">
                 <a:solidFill>
                   <a:srgbClr val="212A33"/>
                 </a:solidFill>
@@ -27254,7 +27254,7 @@
               </a:spcAft>
             </a:pPr>
             <a:r>
-              <a:rPr sz="1450" b="1" i="0">
+              <a:rPr sz="1739" b="1" i="0">
                 <a:solidFill>
                   <a:srgbClr val="6A4C93"/>
                 </a:solidFill>
@@ -27263,7 +27263,7 @@
               <a:t>Volume/Issue:  </a:t>
             </a:r>
             <a:r>
-              <a:rPr sz="1450" b="0" i="0">
+              <a:rPr sz="1739" b="0" i="0">
                 <a:solidFill>
                   <a:srgbClr val="212A33"/>
                 </a:solidFill>
@@ -27285,7 +27285,7 @@
               </a:spcAft>
             </a:pPr>
             <a:r>
-              <a:rPr sz="1450" b="1" i="0">
+              <a:rPr sz="1739" b="1" i="0">
                 <a:solidFill>
                   <a:srgbClr val="6A4C93"/>
                 </a:solidFill>
@@ -27294,7 +27294,7 @@
               <a:t>Pages:  </a:t>
             </a:r>
             <a:r>
-              <a:rPr sz="1450" b="0" i="0">
+              <a:rPr sz="1739" b="0" i="0">
                 <a:solidFill>
                   <a:srgbClr val="212A33"/>
                 </a:solidFill>
@@ -27385,7 +27385,7 @@
               </a:spcAft>
             </a:pPr>
             <a:r>
-              <a:rPr sz="1500" b="1" i="0">
+              <a:rPr sz="1800" b="1" i="0">
                 <a:solidFill>
                   <a:srgbClr val="6A4C93"/>
                 </a:solidFill>
@@ -27407,7 +27407,7 @@
               </a:spcAft>
             </a:pPr>
             <a:r>
-              <a:rPr sz="1500" b="0" i="0">
+              <a:rPr sz="1800" b="0" i="0">
                 <a:solidFill>
                   <a:srgbClr val="B9A8D0"/>
                 </a:solidFill>
@@ -27429,7 +27429,7 @@
               </a:spcAft>
             </a:pPr>
             <a:r>
-              <a:rPr sz="1500" b="0" i="0">
+              <a:rPr sz="1800" b="0" i="0">
                 <a:solidFill>
                   <a:srgbClr val="B9A8D0"/>
                 </a:solidFill>
@@ -27451,7 +27451,7 @@
               </a:spcAft>
             </a:pPr>
             <a:r>
-              <a:rPr sz="1500" b="0" i="0">
+              <a:rPr sz="1800" b="0" i="0">
                 <a:solidFill>
                   <a:srgbClr val="B9A8D0"/>
                 </a:solidFill>
@@ -27473,7 +27473,7 @@
               </a:spcAft>
             </a:pPr>
             <a:r>
-              <a:rPr sz="1500" b="0" i="0">
+              <a:rPr sz="1800" b="0" i="0">
                 <a:solidFill>
                   <a:srgbClr val="B9A8D0"/>
                 </a:solidFill>
@@ -27668,7 +27668,7 @@
               </a:spcAft>
             </a:pPr>
             <a:r>
-              <a:rPr sz="1250" b="1" i="0">
+              <a:rPr sz="1500" b="1" i="0">
                 <a:solidFill>
                   <a:srgbClr val="0F4C5C"/>
                 </a:solidFill>
@@ -27687,8 +27687,8 @@
         </p:nvSpPr>
         <p:spPr>
           <a:xfrm>
-            <a:off x="640080" y="822960"/>
-            <a:ext cx="10424160" cy="1005840"/>
+            <a:off x="640080" y="786384"/>
+            <a:ext cx="11064240" cy="914400"/>
           </a:xfrm>
           <a:prstGeom prst="rect">
             <a:avLst/>
@@ -27713,7 +27713,7 @@
               </a:spcAft>
             </a:pPr>
             <a:r>
-              <a:rPr sz="3200" b="1" i="0">
+              <a:rPr sz="3500" b="1" i="0">
                 <a:solidFill>
                   <a:srgbClr val="212A33"/>
                 </a:solidFill>
@@ -27733,7 +27733,7 @@
         <p:spPr>
           <a:xfrm>
             <a:off x="658368" y="1572768"/>
-            <a:ext cx="1371600" cy="54864"/>
+            <a:ext cx="1463040" cy="64008"/>
           </a:xfrm>
           <a:prstGeom prst="rect">
             <a:avLst/>
@@ -27802,7 +27802,7 @@
               </a:spcAft>
             </a:pPr>
             <a:r>
-              <a:rPr sz="1200" b="1" i="0">
+              <a:rPr sz="1439" b="1" i="0">
                 <a:solidFill>
                   <a:srgbClr val="5B6B73"/>
                 </a:solidFill>
@@ -27847,7 +27847,7 @@
               </a:spcAft>
             </a:pPr>
             <a:r>
-              <a:rPr sz="1000" b="0" i="0">
+              <a:rPr sz="1200" b="0" i="0">
                 <a:solidFill>
                   <a:srgbClr val="5B6B73"/>
                 </a:solidFill>
@@ -27867,7 +27867,7 @@
         <p:spPr>
           <a:xfrm>
             <a:off x="640080" y="1737360"/>
-            <a:ext cx="2514600" cy="384048"/>
+            <a:ext cx="2880360" cy="420624"/>
           </a:xfrm>
           <a:prstGeom prst="roundRect">
             <a:avLst>
@@ -27902,7 +27902,7 @@
           <a:p>
             <a:pPr algn="ctr"/>
             <a:r>
-              <a:rPr sz="1250" b="1">
+              <a:rPr sz="1500" b="1">
                 <a:solidFill>
                   <a:srgbClr val="FFFFFF"/>
                 </a:solidFill>
@@ -27921,8 +27921,8 @@
         </p:nvSpPr>
         <p:spPr>
           <a:xfrm>
-            <a:off x="3337560" y="1737360"/>
-            <a:ext cx="8138160" cy="548640"/>
+            <a:off x="3703320" y="1709928"/>
+            <a:ext cx="7772400" cy="603504"/>
           </a:xfrm>
           <a:prstGeom prst="rect">
             <a:avLst/>
@@ -27947,7 +27947,7 @@
               </a:spcAft>
             </a:pPr>
             <a:r>
-              <a:rPr sz="1350" b="0" i="0">
+              <a:rPr sz="1620" b="0" i="0">
                 <a:solidFill>
                   <a:srgbClr val="212A33"/>
                 </a:solidFill>
@@ -28094,7 +28094,7 @@
               </a:spcAft>
             </a:pPr>
             <a:r>
-              <a:rPr sz="1500" b="0" i="0">
+              <a:rPr sz="1800" b="0" i="0">
                 <a:solidFill>
                   <a:srgbClr val="212A33"/>
                 </a:solidFill>
@@ -28103,7 +28103,7 @@
               <a:t>Did they honestly report </a:t>
             </a:r>
             <a:r>
-              <a:rPr sz="1500" b="1" i="0">
+              <a:rPr sz="1800" b="1" i="0">
                 <a:solidFill>
                   <a:srgbClr val="212A33"/>
                 </a:solidFill>
@@ -28112,7 +28112,7 @@
               <a:t>all</a:t>
             </a:r>
             <a:r>
-              <a:rPr sz="1500" b="0" i="0">
+              <a:rPr sz="1800" b="0" i="0">
                 <a:solidFill>
                   <a:srgbClr val="212A33"/>
                 </a:solidFill>
@@ -28259,7 +28259,7 @@
               </a:spcAft>
             </a:pPr>
             <a:r>
-              <a:rPr sz="1500" b="0" i="0">
+              <a:rPr sz="1800" b="0" i="0">
                 <a:solidFill>
                   <a:srgbClr val="212A33"/>
                 </a:solidFill>
@@ -28406,7 +28406,7 @@
               </a:spcAft>
             </a:pPr>
             <a:r>
-              <a:rPr sz="1500" b="0" i="0">
+              <a:rPr sz="1800" b="0" i="0">
                 <a:solidFill>
                   <a:srgbClr val="212A33"/>
                 </a:solidFill>
@@ -28553,7 +28553,7 @@
               </a:spcAft>
             </a:pPr>
             <a:r>
-              <a:rPr sz="1500" b="0" i="0">
+              <a:rPr sz="1800" b="0" i="0">
                 <a:solidFill>
                   <a:srgbClr val="212A33"/>
                 </a:solidFill>
@@ -28700,7 +28700,7 @@
               </a:spcAft>
             </a:pPr>
             <a:r>
-              <a:rPr sz="1500" b="0" i="0">
+              <a:rPr sz="1800" b="0" i="0">
                 <a:solidFill>
                   <a:srgbClr val="212A33"/>
                 </a:solidFill>
@@ -28709,7 +28709,7 @@
               <a:t>Is the earlier filter design properly </a:t>
             </a:r>
             <a:r>
-              <a:rPr sz="1500" b="1" i="0">
+              <a:rPr sz="1800" b="1" i="0">
                 <a:solidFill>
                   <a:srgbClr val="212A33"/>
                 </a:solidFill>
@@ -28718,7 +28718,7 @@
               <a:t>cited</a:t>
             </a:r>
             <a:r>
-              <a:rPr sz="1500" b="0" i="0">
+              <a:rPr sz="1800" b="0" i="0">
                 <a:solidFill>
                   <a:srgbClr val="212A33"/>
                 </a:solidFill>
@@ -28763,7 +28763,7 @@
               </a:spcAft>
             </a:pPr>
             <a:r>
-              <a:rPr sz="1550" b="1" i="1">
+              <a:rPr sz="1859" b="1" i="1">
                 <a:solidFill>
                   <a:srgbClr val="0F4C5C"/>
                 </a:solidFill>
@@ -28958,7 +28958,7 @@
               </a:spcAft>
             </a:pPr>
             <a:r>
-              <a:rPr sz="1250" b="1" i="0">
+              <a:rPr sz="1500" b="1" i="0">
                 <a:solidFill>
                   <a:srgbClr val="0F4C5C"/>
                 </a:solidFill>
@@ -28977,8 +28977,8 @@
         </p:nvSpPr>
         <p:spPr>
           <a:xfrm>
-            <a:off x="640080" y="822960"/>
-            <a:ext cx="10424160" cy="1005840"/>
+            <a:off x="640080" y="786384"/>
+            <a:ext cx="11064240" cy="914400"/>
           </a:xfrm>
           <a:prstGeom prst="rect">
             <a:avLst/>
@@ -29003,7 +29003,7 @@
               </a:spcAft>
             </a:pPr>
             <a:r>
-              <a:rPr sz="3200" b="1" i="0">
+              <a:rPr sz="3500" b="1" i="0">
                 <a:solidFill>
                   <a:srgbClr val="212A33"/>
                 </a:solidFill>
@@ -29023,7 +29023,7 @@
         <p:spPr>
           <a:xfrm>
             <a:off x="658368" y="1572768"/>
-            <a:ext cx="1371600" cy="54864"/>
+            <a:ext cx="1463040" cy="64008"/>
           </a:xfrm>
           <a:prstGeom prst="rect">
             <a:avLst/>
@@ -29092,7 +29092,7 @@
               </a:spcAft>
             </a:pPr>
             <a:r>
-              <a:rPr sz="1200" b="1" i="0">
+              <a:rPr sz="1439" b="1" i="0">
                 <a:solidFill>
                   <a:srgbClr val="5B6B73"/>
                 </a:solidFill>
@@ -29137,7 +29137,7 @@
               </a:spcAft>
             </a:pPr>
             <a:r>
-              <a:rPr sz="1000" b="0" i="0">
+              <a:rPr sz="1200" b="0" i="0">
                 <a:solidFill>
                   <a:srgbClr val="5B6B73"/>
                 </a:solidFill>
@@ -29236,7 +29236,7 @@
               </a:spcAft>
             </a:pPr>
             <a:r>
-              <a:rPr sz="1650" b="0" i="0">
+              <a:rPr sz="1980" b="0" i="0">
                 <a:solidFill>
                   <a:srgbClr val="212A33"/>
                 </a:solidFill>
@@ -29258,7 +29258,7 @@
               </a:spcAft>
             </a:pPr>
             <a:r>
-              <a:rPr sz="1600" b="1">
+              <a:rPr sz="1920" b="1">
                 <a:solidFill>
                   <a:srgbClr val="2A9D8F"/>
                 </a:solidFill>
@@ -29267,7 +29267,7 @@
               <a:t>•  </a:t>
             </a:r>
             <a:r>
-              <a:rPr sz="1600" b="0" i="0">
+              <a:rPr sz="1920" b="0" i="0">
                 <a:solidFill>
                   <a:srgbClr val="212A33"/>
                 </a:solidFill>
@@ -29289,7 +29289,7 @@
               </a:spcAft>
             </a:pPr>
             <a:r>
-              <a:rPr sz="1600" b="1">
+              <a:rPr sz="1920" b="1">
                 <a:solidFill>
                   <a:srgbClr val="2A9D8F"/>
                 </a:solidFill>
@@ -29298,7 +29298,7 @@
               <a:t>•  </a:t>
             </a:r>
             <a:r>
-              <a:rPr sz="1600" b="0" i="0">
+              <a:rPr sz="1920" b="0" i="0">
                 <a:solidFill>
                   <a:srgbClr val="212A33"/>
                 </a:solidFill>
@@ -29307,7 +29307,7 @@
               <a:t>What happens if the filter </a:t>
             </a:r>
             <a:r>
-              <a:rPr sz="1600" b="0" i="1">
+              <a:rPr sz="1920" b="0" i="1">
                 <a:solidFill>
                   <a:srgbClr val="212A33"/>
                 </a:solidFill>
@@ -29316,7 +29316,7 @@
               <a:t>doesn't</a:t>
             </a:r>
             <a:r>
-              <a:rPr sz="1600" b="0" i="0">
+              <a:rPr sz="1920" b="0" i="0">
                 <a:solidFill>
                   <a:srgbClr val="212A33"/>
                 </a:solidFill>
@@ -29338,7 +29338,7 @@
               </a:spcAft>
             </a:pPr>
             <a:r>
-              <a:rPr sz="1600" b="1">
+              <a:rPr sz="1920" b="1">
                 <a:solidFill>
                   <a:srgbClr val="2A9D8F"/>
                 </a:solidFill>
@@ -29347,7 +29347,7 @@
               <a:t>•  </a:t>
             </a:r>
             <a:r>
-              <a:rPr sz="1600" b="0" i="0">
+              <a:rPr sz="1920" b="0" i="0">
                 <a:solidFill>
                   <a:srgbClr val="212A33"/>
                 </a:solidFill>
@@ -29369,7 +29369,7 @@
               </a:spcAft>
             </a:pPr>
             <a:r>
-              <a:rPr sz="1650" b="1" i="1">
+              <a:rPr sz="1980" b="1" i="1">
                 <a:solidFill>
                   <a:srgbClr val="0F4C5C"/>
                 </a:solidFill>
@@ -29818,7 +29818,7 @@
               </a:spcAft>
             </a:pPr>
             <a:r>
-              <a:rPr sz="1500" b="1" i="0">
+              <a:rPr sz="1800" b="1" i="0">
                 <a:solidFill>
                   <a:srgbClr val="FFFFFF"/>
                 </a:solidFill>
@@ -29840,7 +29840,7 @@
               </a:spcAft>
             </a:pPr>
             <a:r>
-              <a:rPr sz="1200" b="0" i="1">
+              <a:rPr sz="1439" b="0" i="1">
                 <a:solidFill>
                   <a:srgbClr val="BFDDD8"/>
                 </a:solidFill>
@@ -30035,7 +30035,7 @@
               </a:spcAft>
             </a:pPr>
             <a:r>
-              <a:rPr sz="1250" b="1" i="0">
+              <a:rPr sz="1500" b="1" i="0">
                 <a:solidFill>
                   <a:srgbClr val="0F4C5C"/>
                 </a:solidFill>
@@ -30054,8 +30054,8 @@
         </p:nvSpPr>
         <p:spPr>
           <a:xfrm>
-            <a:off x="640080" y="822960"/>
-            <a:ext cx="10424160" cy="1005840"/>
+            <a:off x="640080" y="786384"/>
+            <a:ext cx="11064240" cy="914400"/>
           </a:xfrm>
           <a:prstGeom prst="rect">
             <a:avLst/>
@@ -30080,7 +30080,7 @@
               </a:spcAft>
             </a:pPr>
             <a:r>
-              <a:rPr sz="3200" b="1" i="0">
+              <a:rPr sz="3500" b="1" i="0">
                 <a:solidFill>
                   <a:srgbClr val="212A33"/>
                 </a:solidFill>
@@ -30100,7 +30100,7 @@
         <p:spPr>
           <a:xfrm>
             <a:off x="658368" y="1572768"/>
-            <a:ext cx="1371600" cy="54864"/>
+            <a:ext cx="1463040" cy="64008"/>
           </a:xfrm>
           <a:prstGeom prst="rect">
             <a:avLst/>
@@ -30169,7 +30169,7 @@
               </a:spcAft>
             </a:pPr>
             <a:r>
-              <a:rPr sz="1200" b="1" i="0">
+              <a:rPr sz="1439" b="1" i="0">
                 <a:solidFill>
                   <a:srgbClr val="5B6B73"/>
                 </a:solidFill>
@@ -30214,7 +30214,7 @@
               </a:spcAft>
             </a:pPr>
             <a:r>
-              <a:rPr sz="1000" b="0" i="0">
+              <a:rPr sz="1200" b="0" i="0">
                 <a:solidFill>
                   <a:srgbClr val="5B6B73"/>
                 </a:solidFill>
@@ -30255,7 +30255,7 @@
                     <a:p>
                       <a:pPr algn="l"/>
                       <a:r>
-                        <a:rPr sz="1600" b="1" i="0">
+                        <a:rPr sz="1920" b="1" i="0">
                           <a:solidFill>
                             <a:srgbClr val="FFFFFF"/>
                           </a:solidFill>
@@ -30278,7 +30278,7 @@
                     <a:p>
                       <a:pPr algn="l"/>
                       <a:r>
-                        <a:rPr sz="1600" b="1" i="0">
+                        <a:rPr sz="1920" b="1" i="0">
                           <a:solidFill>
                             <a:srgbClr val="FFFFFF"/>
                           </a:solidFill>
@@ -30303,7 +30303,7 @@
                     <a:p>
                       <a:pPr algn="l"/>
                       <a:r>
-                        <a:rPr sz="1500" b="0" i="0">
+                        <a:rPr sz="1800" b="0" i="0">
                           <a:solidFill>
                             <a:srgbClr val="212A33"/>
                           </a:solidFill>
@@ -30326,7 +30326,7 @@
                     <a:p>
                       <a:pPr algn="l"/>
                       <a:r>
-                        <a:rPr sz="1500" b="0" i="0">
+                        <a:rPr sz="1800" b="0" i="0">
                           <a:solidFill>
                             <a:srgbClr val="212A33"/>
                           </a:solidFill>
@@ -30351,7 +30351,7 @@
                     <a:p>
                       <a:pPr algn="l"/>
                       <a:r>
-                        <a:rPr sz="1500" b="0" i="0">
+                        <a:rPr sz="1800" b="0" i="0">
                           <a:solidFill>
                             <a:srgbClr val="212A33"/>
                           </a:solidFill>
@@ -30374,7 +30374,7 @@
                     <a:p>
                       <a:pPr algn="l"/>
                       <a:r>
-                        <a:rPr sz="1500" b="0" i="0">
+                        <a:rPr sz="1800" b="0" i="0">
                           <a:solidFill>
                             <a:srgbClr val="212A33"/>
                           </a:solidFill>
@@ -30399,7 +30399,7 @@
                     <a:p>
                       <a:pPr algn="l"/>
                       <a:r>
-                        <a:rPr sz="1500" b="0" i="0">
+                        <a:rPr sz="1800" b="0" i="0">
                           <a:solidFill>
                             <a:srgbClr val="212A33"/>
                           </a:solidFill>
@@ -30422,7 +30422,7 @@
                     <a:p>
                       <a:pPr algn="l"/>
                       <a:r>
-                        <a:rPr sz="1500" b="0" i="0">
+                        <a:rPr sz="1800" b="0" i="0">
                           <a:solidFill>
                             <a:srgbClr val="212A33"/>
                           </a:solidFill>
@@ -30447,7 +30447,7 @@
                     <a:p>
                       <a:pPr algn="l"/>
                       <a:r>
-                        <a:rPr sz="1500" b="0" i="0">
+                        <a:rPr sz="1800" b="0" i="0">
                           <a:solidFill>
                             <a:srgbClr val="212A33"/>
                           </a:solidFill>
@@ -30470,7 +30470,7 @@
                     <a:p>
                       <a:pPr algn="l"/>
                       <a:r>
-                        <a:rPr sz="1500" b="0" i="0">
+                        <a:rPr sz="1800" b="0" i="0">
                           <a:solidFill>
                             <a:srgbClr val="212A33"/>
                           </a:solidFill>
@@ -30495,7 +30495,7 @@
                     <a:p>
                       <a:pPr algn="l"/>
                       <a:r>
-                        <a:rPr sz="1500" b="0" i="0">
+                        <a:rPr sz="1800" b="0" i="0">
                           <a:solidFill>
                             <a:srgbClr val="212A33"/>
                           </a:solidFill>
@@ -30518,7 +30518,7 @@
                     <a:p>
                       <a:pPr algn="l"/>
                       <a:r>
-                        <a:rPr sz="1500" b="0" i="0">
+                        <a:rPr sz="1800" b="0" i="0">
                           <a:solidFill>
                             <a:srgbClr val="212A33"/>
                           </a:solidFill>
@@ -30543,7 +30543,7 @@
                     <a:p>
                       <a:pPr algn="l"/>
                       <a:r>
-                        <a:rPr sz="1500" b="0" i="0">
+                        <a:rPr sz="1800" b="0" i="0">
                           <a:solidFill>
                             <a:srgbClr val="212A33"/>
                           </a:solidFill>
@@ -30566,7 +30566,7 @@
                     <a:p>
                       <a:pPr algn="l"/>
                       <a:r>
-                        <a:rPr sz="1500" b="0" i="0">
+                        <a:rPr sz="1800" b="0" i="0">
                           <a:solidFill>
                             <a:srgbClr val="212A33"/>
                           </a:solidFill>
@@ -30771,7 +30771,7 @@
               </a:spcAft>
             </a:pPr>
             <a:r>
-              <a:rPr sz="1250" b="1" i="0">
+              <a:rPr sz="1500" b="1" i="0">
                 <a:solidFill>
                   <a:srgbClr val="0F4C5C"/>
                 </a:solidFill>
@@ -30790,8 +30790,8 @@
         </p:nvSpPr>
         <p:spPr>
           <a:xfrm>
-            <a:off x="640080" y="822960"/>
-            <a:ext cx="10424160" cy="1005840"/>
+            <a:off x="640080" y="786384"/>
+            <a:ext cx="11064240" cy="914400"/>
           </a:xfrm>
           <a:prstGeom prst="rect">
             <a:avLst/>
@@ -30816,7 +30816,7 @@
               </a:spcAft>
             </a:pPr>
             <a:r>
-              <a:rPr sz="3200" b="1" i="0">
+              <a:rPr sz="3500" b="1" i="0">
                 <a:solidFill>
                   <a:srgbClr val="212A33"/>
                 </a:solidFill>
@@ -30836,7 +30836,7 @@
         <p:spPr>
           <a:xfrm>
             <a:off x="658368" y="1572768"/>
-            <a:ext cx="1371600" cy="54864"/>
+            <a:ext cx="1463040" cy="64008"/>
           </a:xfrm>
           <a:prstGeom prst="rect">
             <a:avLst/>
@@ -30905,7 +30905,7 @@
               </a:spcAft>
             </a:pPr>
             <a:r>
-              <a:rPr sz="1200" b="1" i="0">
+              <a:rPr sz="1439" b="1" i="0">
                 <a:solidFill>
                   <a:srgbClr val="5B6B73"/>
                 </a:solidFill>
@@ -30950,7 +30950,7 @@
               </a:spcAft>
             </a:pPr>
             <a:r>
-              <a:rPr sz="1000" b="0" i="0">
+              <a:rPr sz="1200" b="0" i="0">
                 <a:solidFill>
                   <a:srgbClr val="5B6B73"/>
                 </a:solidFill>
@@ -30995,7 +30995,7 @@
               </a:spcAft>
             </a:pPr>
             <a:r>
-              <a:rPr sz="1700" b="1">
+              <a:rPr sz="2039" b="1">
                 <a:solidFill>
                   <a:srgbClr val="C99A2E"/>
                 </a:solidFill>
@@ -31004,7 +31004,7 @@
               <a:t>•  </a:t>
             </a:r>
             <a:r>
-              <a:rPr sz="1700" b="0" i="0">
+              <a:rPr sz="2039" b="0" i="0">
                 <a:solidFill>
                   <a:srgbClr val="212A33"/>
                 </a:solidFill>
@@ -31013,7 +31013,7 @@
               <a:t>Many students think “ethics” is something you check </a:t>
             </a:r>
             <a:r>
-              <a:rPr sz="1700" b="0" i="1">
+              <a:rPr sz="2039" b="0" i="1">
                 <a:solidFill>
                   <a:srgbClr val="212A33"/>
                 </a:solidFill>
@@ -31022,7 +31022,7 @@
               <a:t>once</a:t>
             </a:r>
             <a:r>
-              <a:rPr sz="1700" b="0" i="0">
+              <a:rPr sz="2039" b="0" i="0">
                 <a:solidFill>
                   <a:srgbClr val="212A33"/>
                 </a:solidFill>
@@ -31044,7 +31044,7 @@
               </a:spcAft>
             </a:pPr>
             <a:r>
-              <a:rPr sz="1700" b="1">
+              <a:rPr sz="2039" b="1">
                 <a:solidFill>
                   <a:srgbClr val="C99A2E"/>
                 </a:solidFill>
@@ -31053,7 +31053,7 @@
               <a:t>•  </a:t>
             </a:r>
             <a:r>
-              <a:rPr sz="1700" b="0" i="0">
+              <a:rPr sz="2039" b="0" i="0">
                 <a:solidFill>
                   <a:srgbClr val="212A33"/>
                 </a:solidFill>
@@ -31062,7 +31062,7 @@
               <a:t>In reality, </a:t>
             </a:r>
             <a:r>
-              <a:rPr sz="1700" b="1" i="0">
+              <a:rPr sz="2039" b="1" i="0">
                 <a:solidFill>
                   <a:srgbClr val="0F4C5C"/>
                 </a:solidFill>
@@ -31071,7 +31071,7 @@
               <a:t>research ethics</a:t>
             </a:r>
             <a:r>
-              <a:rPr sz="1700" b="0" i="0">
+              <a:rPr sz="2039" b="0" i="0">
                 <a:solidFill>
                   <a:srgbClr val="212A33"/>
                 </a:solidFill>
@@ -31080,7 +31080,7 @@
               <a:t> applies </a:t>
             </a:r>
             <a:r>
-              <a:rPr sz="1700" b="1" i="0">
+              <a:rPr sz="2039" b="1" i="0">
                 <a:solidFill>
                   <a:srgbClr val="212A33"/>
                 </a:solidFill>
@@ -31089,7 +31089,7 @@
               <a:t>continuously</a:t>
             </a:r>
             <a:r>
-              <a:rPr sz="1700" b="0" i="0">
+              <a:rPr sz="2039" b="0" i="0">
                 <a:solidFill>
                   <a:srgbClr val="212A33"/>
                 </a:solidFill>
@@ -31151,7 +31151,7 @@
               </a:spcAft>
             </a:pPr>
             <a:r>
-              <a:rPr sz="1350" b="1">
+              <a:rPr sz="1620" b="1">
                 <a:solidFill>
                   <a:srgbClr val="5B6B73"/>
                 </a:solidFill>
@@ -31213,7 +31213,7 @@
               </a:spcAft>
             </a:pPr>
             <a:r>
-              <a:rPr sz="1350" b="1">
+              <a:rPr sz="1620" b="1">
                 <a:solidFill>
                   <a:srgbClr val="5B6B73"/>
                 </a:solidFill>
@@ -31232,7 +31232,7 @@
               </a:spcAft>
             </a:pPr>
             <a:r>
-              <a:rPr sz="1350" b="1">
+              <a:rPr sz="1620" b="1">
                 <a:solidFill>
                   <a:srgbClr val="5B6B73"/>
                 </a:solidFill>
@@ -31294,7 +31294,7 @@
               </a:spcAft>
             </a:pPr>
             <a:r>
-              <a:rPr sz="1350" b="1">
+              <a:rPr sz="1620" b="1">
                 <a:solidFill>
                   <a:srgbClr val="5B6B73"/>
                 </a:solidFill>
@@ -31313,7 +31313,7 @@
               </a:spcAft>
             </a:pPr>
             <a:r>
-              <a:rPr sz="1350" b="1">
+              <a:rPr sz="1620" b="1">
                 <a:solidFill>
                   <a:srgbClr val="5B6B73"/>
                 </a:solidFill>
@@ -31375,7 +31375,7 @@
               </a:spcAft>
             </a:pPr>
             <a:r>
-              <a:rPr sz="1350" b="1">
+              <a:rPr sz="1620" b="1">
                 <a:solidFill>
                   <a:srgbClr val="5B6B73"/>
                 </a:solidFill>
@@ -31394,7 +31394,7 @@
               </a:spcAft>
             </a:pPr>
             <a:r>
-              <a:rPr sz="1350" b="1">
+              <a:rPr sz="1620" b="1">
                 <a:solidFill>
                   <a:srgbClr val="5B6B73"/>
                 </a:solidFill>
@@ -31456,7 +31456,7 @@
               </a:spcAft>
             </a:pPr>
             <a:r>
-              <a:rPr sz="1350" b="1">
+              <a:rPr sz="1620" b="1">
                 <a:solidFill>
                   <a:srgbClr val="5B6B73"/>
                 </a:solidFill>
@@ -31475,7 +31475,7 @@
               </a:spcAft>
             </a:pPr>
             <a:r>
-              <a:rPr sz="1350" b="1">
+              <a:rPr sz="1620" b="1">
                 <a:solidFill>
                   <a:srgbClr val="5B6B73"/>
                 </a:solidFill>
@@ -31520,7 +31520,7 @@
               </a:spcAft>
             </a:pPr>
             <a:r>
-              <a:rPr sz="1600" b="1" i="1">
+              <a:rPr sz="1920" b="1" i="1">
                 <a:solidFill>
                   <a:srgbClr val="0F4C5C"/>
                 </a:solidFill>
@@ -31715,7 +31715,7 @@
               </a:spcAft>
             </a:pPr>
             <a:r>
-              <a:rPr sz="1250" b="1" i="0">
+              <a:rPr sz="1500" b="1" i="0">
                 <a:solidFill>
                   <a:srgbClr val="0F4C5C"/>
                 </a:solidFill>
@@ -31734,8 +31734,8 @@
         </p:nvSpPr>
         <p:spPr>
           <a:xfrm>
-            <a:off x="640080" y="822960"/>
-            <a:ext cx="10424160" cy="1005840"/>
+            <a:off x="640080" y="786384"/>
+            <a:ext cx="11064240" cy="914400"/>
           </a:xfrm>
           <a:prstGeom prst="rect">
             <a:avLst/>
@@ -31760,7 +31760,7 @@
               </a:spcAft>
             </a:pPr>
             <a:r>
-              <a:rPr sz="3200" b="1" i="0">
+              <a:rPr sz="3500" b="1" i="0">
                 <a:solidFill>
                   <a:srgbClr val="212A33"/>
                 </a:solidFill>
@@ -31780,7 +31780,7 @@
         <p:spPr>
           <a:xfrm>
             <a:off x="658368" y="1572768"/>
-            <a:ext cx="1371600" cy="54864"/>
+            <a:ext cx="1463040" cy="64008"/>
           </a:xfrm>
           <a:prstGeom prst="rect">
             <a:avLst/>
@@ -31849,7 +31849,7 @@
               </a:spcAft>
             </a:pPr>
             <a:r>
-              <a:rPr sz="1200" b="1" i="0">
+              <a:rPr sz="1439" b="1" i="0">
                 <a:solidFill>
                   <a:srgbClr val="5B6B73"/>
                 </a:solidFill>
@@ -31894,7 +31894,7 @@
               </a:spcAft>
             </a:pPr>
             <a:r>
-              <a:rPr sz="1000" b="0" i="0">
+              <a:rPr sz="1200" b="0" i="0">
                 <a:solidFill>
                   <a:srgbClr val="5B6B73"/>
                 </a:solidFill>
@@ -31991,7 +31991,7 @@
               </a:spcAft>
             </a:pPr>
             <a:r>
-              <a:rPr sz="2100" b="1" i="0">
+              <a:rPr sz="2520" b="1" i="0">
                 <a:solidFill>
                   <a:srgbClr val="E9C46A"/>
                 </a:solidFill>
@@ -32000,7 +32000,7 @@
               <a:t>Research ethics</a:t>
             </a:r>
             <a:r>
-              <a:rPr sz="1800" b="0" i="0">
+              <a:rPr sz="2160" b="0" i="0">
                 <a:solidFill>
                   <a:srgbClr val="FFFFFF"/>
                 </a:solidFill>
@@ -32009,7 +32009,7 @@
               <a:t>  —  the standards and principles that guide </a:t>
             </a:r>
             <a:r>
-              <a:rPr sz="1800" b="1" i="1">
+              <a:rPr sz="2160" b="1" i="1">
                 <a:solidFill>
                   <a:srgbClr val="FFFFFF"/>
                 </a:solidFill>
@@ -32018,7 +32018,7 @@
               <a:t>responsible and trustworthy</a:t>
             </a:r>
             <a:r>
-              <a:rPr sz="1800" b="0" i="0">
+              <a:rPr sz="2160" b="0" i="0">
                 <a:solidFill>
                   <a:srgbClr val="FFFFFF"/>
                 </a:solidFill>
@@ -32063,7 +32063,7 @@
               </a:spcAft>
             </a:pPr>
             <a:r>
-              <a:rPr sz="1700" b="0" i="0">
+              <a:rPr sz="2039" b="0" i="0">
                 <a:solidFill>
                   <a:srgbClr val="212A33"/>
                 </a:solidFill>
@@ -32108,7 +32108,7 @@
               </a:spcAft>
             </a:pPr>
             <a:r>
-              <a:rPr sz="1650" b="1">
+              <a:rPr sz="1980" b="1">
                 <a:solidFill>
                   <a:srgbClr val="2A9D8F"/>
                 </a:solidFill>
@@ -32117,7 +32117,7 @@
               <a:t>•  </a:t>
             </a:r>
             <a:r>
-              <a:rPr sz="1650" b="0" i="0">
+              <a:rPr sz="1980" b="0" i="0">
                 <a:solidFill>
                   <a:srgbClr val="212A33"/>
                 </a:solidFill>
@@ -32126,7 +32126,7 @@
               <a:t>Collecting data </a:t>
             </a:r>
             <a:r>
-              <a:rPr sz="1650" b="1" i="0">
+              <a:rPr sz="1980" b="1" i="0">
                 <a:solidFill>
                   <a:srgbClr val="212A33"/>
                 </a:solidFill>
@@ -32135,7 +32135,7 @@
               <a:t>from</a:t>
             </a:r>
             <a:r>
-              <a:rPr sz="1650" b="0" i="0">
+              <a:rPr sz="1980" b="0" i="0">
                 <a:solidFill>
                   <a:srgbClr val="212A33"/>
                 </a:solidFill>
@@ -32144,7 +32144,7 @@
               <a:t> or </a:t>
             </a:r>
             <a:r>
-              <a:rPr sz="1650" b="1" i="0">
+              <a:rPr sz="1980" b="1" i="0">
                 <a:solidFill>
                   <a:srgbClr val="212A33"/>
                 </a:solidFill>
@@ -32153,7 +32153,7 @@
               <a:t>about</a:t>
             </a:r>
             <a:r>
-              <a:rPr sz="1650" b="0" i="0">
+              <a:rPr sz="1980" b="0" i="0">
                 <a:solidFill>
                   <a:srgbClr val="212A33"/>
                 </a:solidFill>
@@ -32175,7 +32175,7 @@
               </a:spcAft>
             </a:pPr>
             <a:r>
-              <a:rPr sz="1650" b="1">
+              <a:rPr sz="1980" b="1">
                 <a:solidFill>
                   <a:srgbClr val="2A9D8F"/>
                 </a:solidFill>
@@ -32184,7 +32184,7 @@
               <a:t>•  </a:t>
             </a:r>
             <a:r>
-              <a:rPr sz="1650" b="0" i="0">
+              <a:rPr sz="1980" b="0" i="0">
                 <a:solidFill>
                   <a:srgbClr val="212A33"/>
                 </a:solidFill>
@@ -32193,7 +32193,7 @@
               <a:t>Working within real </a:t>
             </a:r>
             <a:r>
-              <a:rPr sz="1650" b="1" i="0">
+              <a:rPr sz="1980" b="1" i="0">
                 <a:solidFill>
                   <a:srgbClr val="212A33"/>
                 </a:solidFill>
@@ -32202,7 +32202,7 @@
               <a:t>communities</a:t>
             </a:r>
             <a:r>
-              <a:rPr sz="1650" b="0" i="0">
+              <a:rPr sz="1980" b="0" i="0">
                 <a:solidFill>
                   <a:srgbClr val="212A33"/>
                 </a:solidFill>
@@ -32211,7 +32211,7 @@
               <a:t> and </a:t>
             </a:r>
             <a:r>
-              <a:rPr sz="1650" b="1" i="0">
+              <a:rPr sz="1980" b="1" i="0">
                 <a:solidFill>
                   <a:srgbClr val="212A33"/>
                 </a:solidFill>
@@ -32233,7 +32233,7 @@
               </a:spcAft>
             </a:pPr>
             <a:r>
-              <a:rPr sz="1650" b="1">
+              <a:rPr sz="1980" b="1">
                 <a:solidFill>
                   <a:srgbClr val="2A9D8F"/>
                 </a:solidFill>
@@ -32242,7 +32242,7 @@
               <a:t>•  </a:t>
             </a:r>
             <a:r>
-              <a:rPr sz="1650" b="0" i="0">
+              <a:rPr sz="1980" b="0" i="0">
                 <a:solidFill>
                   <a:srgbClr val="212A33"/>
                 </a:solidFill>
@@ -32251,7 +32251,7 @@
               <a:t>Producing findings that others will </a:t>
             </a:r>
             <a:r>
-              <a:rPr sz="1650" b="1" i="0">
+              <a:rPr sz="1980" b="1" i="0">
                 <a:solidFill>
                   <a:srgbClr val="212A33"/>
                 </a:solidFill>
@@ -32296,7 +32296,7 @@
               </a:spcAft>
             </a:pPr>
             <a:r>
-              <a:rPr sz="1650" b="1" i="1">
+              <a:rPr sz="1980" b="1" i="1">
                 <a:solidFill>
                   <a:srgbClr val="0F4C5C"/>
                 </a:solidFill>
@@ -32491,7 +32491,7 @@
               </a:spcAft>
             </a:pPr>
             <a:r>
-              <a:rPr sz="1250" b="1" i="0">
+              <a:rPr sz="1500" b="1" i="0">
                 <a:solidFill>
                   <a:srgbClr val="0F4C5C"/>
                 </a:solidFill>
@@ -32510,8 +32510,8 @@
         </p:nvSpPr>
         <p:spPr>
           <a:xfrm>
-            <a:off x="640080" y="822960"/>
-            <a:ext cx="10424160" cy="1005840"/>
+            <a:off x="640080" y="786384"/>
+            <a:ext cx="11064240" cy="914400"/>
           </a:xfrm>
           <a:prstGeom prst="rect">
             <a:avLst/>
@@ -32536,7 +32536,7 @@
               </a:spcAft>
             </a:pPr>
             <a:r>
-              <a:rPr sz="3200" b="1" i="0">
+              <a:rPr sz="3500" b="1" i="0">
                 <a:solidFill>
                   <a:srgbClr val="212A33"/>
                 </a:solidFill>
@@ -32556,7 +32556,7 @@
         <p:spPr>
           <a:xfrm>
             <a:off x="658368" y="1572768"/>
-            <a:ext cx="1371600" cy="54864"/>
+            <a:ext cx="1463040" cy="64008"/>
           </a:xfrm>
           <a:prstGeom prst="rect">
             <a:avLst/>
@@ -32625,7 +32625,7 @@
               </a:spcAft>
             </a:pPr>
             <a:r>
-              <a:rPr sz="1200" b="1" i="0">
+              <a:rPr sz="1439" b="1" i="0">
                 <a:solidFill>
                   <a:srgbClr val="5B6B73"/>
                 </a:solidFill>
@@ -32670,7 +32670,7 @@
               </a:spcAft>
             </a:pPr>
             <a:r>
-              <a:rPr sz="1000" b="0" i="0">
+              <a:rPr sz="1200" b="0" i="0">
                 <a:solidFill>
                   <a:srgbClr val="5B6B73"/>
                 </a:solidFill>
@@ -32715,7 +32715,7 @@
               </a:spcAft>
             </a:pPr>
             <a:r>
-              <a:rPr sz="1700" b="0" i="0">
+              <a:rPr sz="2039" b="0" i="0">
                 <a:solidFill>
                   <a:srgbClr val="212A33"/>
                 </a:solidFill>
@@ -32902,7 +32902,7 @@
               </a:spcAft>
             </a:pPr>
             <a:r>
-              <a:rPr sz="2200" b="1" i="0">
+              <a:rPr sz="2640" b="1" i="0">
                 <a:solidFill>
                   <a:srgbClr val="FFFFFF"/>
                 </a:solidFill>
@@ -32947,7 +32947,7 @@
               </a:spcAft>
             </a:pPr>
             <a:r>
-              <a:rPr sz="1650" b="1" i="0">
+              <a:rPr sz="1980" b="1" i="0">
                 <a:solidFill>
                   <a:srgbClr val="FFFFFF"/>
                 </a:solidFill>
@@ -32992,7 +32992,7 @@
               </a:spcAft>
             </a:pPr>
             <a:r>
-              <a:rPr sz="1400" b="0" i="0">
+              <a:rPr sz="1680" b="0" i="0">
                 <a:solidFill>
                   <a:srgbClr val="212A33"/>
                 </a:solidFill>
@@ -33179,7 +33179,7 @@
               </a:spcAft>
             </a:pPr>
             <a:r>
-              <a:rPr sz="2200" b="1" i="0">
+              <a:rPr sz="2640" b="1" i="0">
                 <a:solidFill>
                   <a:srgbClr val="FFFFFF"/>
                 </a:solidFill>
@@ -33224,7 +33224,7 @@
               </a:spcAft>
             </a:pPr>
             <a:r>
-              <a:rPr sz="1650" b="1" i="0">
+              <a:rPr sz="1980" b="1" i="0">
                 <a:solidFill>
                   <a:srgbClr val="FFFFFF"/>
                 </a:solidFill>
@@ -33269,7 +33269,7 @@
               </a:spcAft>
             </a:pPr>
             <a:r>
-              <a:rPr sz="1400" b="0" i="0">
+              <a:rPr sz="1680" b="0" i="0">
                 <a:solidFill>
                   <a:srgbClr val="212A33"/>
                 </a:solidFill>
@@ -33456,7 +33456,7 @@
               </a:spcAft>
             </a:pPr>
             <a:r>
-              <a:rPr sz="2200" b="1" i="0">
+              <a:rPr sz="2640" b="1" i="0">
                 <a:solidFill>
                   <a:srgbClr val="FFFFFF"/>
                 </a:solidFill>
@@ -33501,7 +33501,7 @@
               </a:spcAft>
             </a:pPr>
             <a:r>
-              <a:rPr sz="1650" b="1" i="0">
+              <a:rPr sz="1980" b="1" i="0">
                 <a:solidFill>
                   <a:srgbClr val="FFFFFF"/>
                 </a:solidFill>
@@ -33546,7 +33546,7 @@
               </a:spcAft>
             </a:pPr>
             <a:r>
-              <a:rPr sz="1400" b="0" i="0">
+              <a:rPr sz="1680" b="0" i="0">
                 <a:solidFill>
                   <a:srgbClr val="212A33"/>
                 </a:solidFill>
@@ -33741,7 +33741,7 @@
               </a:spcAft>
             </a:pPr>
             <a:r>
-              <a:rPr sz="1250" b="1" i="0">
+              <a:rPr sz="1500" b="1" i="0">
                 <a:solidFill>
                   <a:srgbClr val="0F4C5C"/>
                 </a:solidFill>
@@ -33760,8 +33760,8 @@
         </p:nvSpPr>
         <p:spPr>
           <a:xfrm>
-            <a:off x="640080" y="822960"/>
-            <a:ext cx="10424160" cy="1005840"/>
+            <a:off x="640080" y="786384"/>
+            <a:ext cx="11064240" cy="914400"/>
           </a:xfrm>
           <a:prstGeom prst="rect">
             <a:avLst/>
@@ -33786,7 +33786,7 @@
               </a:spcAft>
             </a:pPr>
             <a:r>
-              <a:rPr sz="3200" b="1" i="0">
+              <a:rPr sz="3500" b="1" i="0">
                 <a:solidFill>
                   <a:srgbClr val="212A33"/>
                 </a:solidFill>
@@ -33806,7 +33806,7 @@
         <p:spPr>
           <a:xfrm>
             <a:off x="658368" y="1572768"/>
-            <a:ext cx="1371600" cy="54864"/>
+            <a:ext cx="1463040" cy="64008"/>
           </a:xfrm>
           <a:prstGeom prst="rect">
             <a:avLst/>
@@ -33875,7 +33875,7 @@
               </a:spcAft>
             </a:pPr>
             <a:r>
-              <a:rPr sz="1200" b="1" i="0">
+              <a:rPr sz="1439" b="1" i="0">
                 <a:solidFill>
                   <a:srgbClr val="5B6B73"/>
                 </a:solidFill>
@@ -33920,7 +33920,7 @@
               </a:spcAft>
             </a:pPr>
             <a:r>
-              <a:rPr sz="1000" b="0" i="0">
+              <a:rPr sz="1200" b="0" i="0">
                 <a:solidFill>
                   <a:srgbClr val="5B6B73"/>
                 </a:solidFill>
@@ -33940,7 +33940,7 @@
         <p:spPr>
           <a:xfrm>
             <a:off x="640080" y="1783080"/>
-            <a:ext cx="1234440" cy="384048"/>
+            <a:ext cx="1463040" cy="420624"/>
           </a:xfrm>
           <a:prstGeom prst="roundRect">
             <a:avLst>
@@ -33975,7 +33975,7 @@
           <a:p>
             <a:pPr algn="ctr"/>
             <a:r>
-              <a:rPr sz="1250" b="1">
+              <a:rPr sz="1500" b="1">
                 <a:solidFill>
                   <a:srgbClr val="FFFFFF"/>
                 </a:solidFill>
@@ -33994,8 +33994,8 @@
         </p:nvSpPr>
         <p:spPr>
           <a:xfrm>
-            <a:off x="2057400" y="1810512"/>
-            <a:ext cx="9144000" cy="411480"/>
+            <a:off x="2331720" y="1810512"/>
+            <a:ext cx="9144000" cy="457200"/>
           </a:xfrm>
           <a:prstGeom prst="rect">
             <a:avLst/>
@@ -34020,7 +34020,7 @@
               </a:spcAft>
             </a:pPr>
             <a:r>
-              <a:rPr sz="1600" b="1" i="0">
+              <a:rPr sz="1920" b="1" i="0">
                 <a:solidFill>
                   <a:srgbClr val="0F4C5C"/>
                 </a:solidFill>
@@ -34065,7 +34065,7 @@
               </a:spcAft>
             </a:pPr>
             <a:r>
-              <a:rPr sz="1600" b="0" i="0">
+              <a:rPr sz="1920" b="0" i="0">
                 <a:solidFill>
                   <a:srgbClr val="212A33"/>
                 </a:solidFill>
@@ -34074,7 +34074,7 @@
               <a:t>For each group below, identify </a:t>
             </a:r>
             <a:r>
-              <a:rPr sz="1600" b="1" i="0">
+              <a:rPr sz="1920" b="1" i="0">
                 <a:solidFill>
                   <a:srgbClr val="212A33"/>
                 </a:solidFill>
@@ -34083,7 +34083,7 @@
               <a:t>one specific way</a:t>
             </a:r>
             <a:r>
-              <a:rPr sz="1600" b="0" i="0">
+              <a:rPr sz="1920" b="0" i="0">
                 <a:solidFill>
                   <a:srgbClr val="212A33"/>
                 </a:solidFill>
@@ -34226,7 +34226,7 @@
               </a:spcAft>
             </a:pPr>
             <a:r>
-              <a:rPr sz="1800" b="1" i="0">
+              <a:rPr sz="2160" b="1" i="0">
                 <a:solidFill>
                   <a:srgbClr val="FFFFFF"/>
                 </a:solidFill>
@@ -34271,7 +34271,7 @@
               </a:spcAft>
             </a:pPr>
             <a:r>
-              <a:rPr sz="1500" b="0" i="0">
+              <a:rPr sz="1800" b="0" i="0">
                 <a:solidFill>
                   <a:srgbClr val="212A33"/>
                 </a:solidFill>
@@ -34414,7 +34414,7 @@
               </a:spcAft>
             </a:pPr>
             <a:r>
-              <a:rPr sz="1800" b="1" i="0">
+              <a:rPr sz="2160" b="1" i="0">
                 <a:solidFill>
                   <a:srgbClr val="FFFFFF"/>
                 </a:solidFill>
@@ -34459,7 +34459,7 @@
               </a:spcAft>
             </a:pPr>
             <a:r>
-              <a:rPr sz="1500" b="0" i="0">
+              <a:rPr sz="1800" b="0" i="0">
                 <a:solidFill>
                   <a:srgbClr val="212A33"/>
                 </a:solidFill>
@@ -34602,7 +34602,7 @@
               </a:spcAft>
             </a:pPr>
             <a:r>
-              <a:rPr sz="1800" b="1" i="0">
+              <a:rPr sz="2160" b="1" i="0">
                 <a:solidFill>
                   <a:srgbClr val="FFFFFF"/>
                 </a:solidFill>
@@ -34647,7 +34647,7 @@
               </a:spcAft>
             </a:pPr>
             <a:r>
-              <a:rPr sz="1500" b="0" i="0">
+              <a:rPr sz="1800" b="0" i="0">
                 <a:solidFill>
                   <a:srgbClr val="212A33"/>
                 </a:solidFill>
@@ -34790,7 +34790,7 @@
               </a:spcAft>
             </a:pPr>
             <a:r>
-              <a:rPr sz="1800" b="1" i="0">
+              <a:rPr sz="2160" b="1" i="0">
                 <a:solidFill>
                   <a:srgbClr val="FFFFFF"/>
                 </a:solidFill>
@@ -34835,7 +34835,7 @@
               </a:spcAft>
             </a:pPr>
             <a:r>
-              <a:rPr sz="1500" b="0" i="0">
+              <a:rPr sz="1800" b="0" i="0">
                 <a:solidFill>
                   <a:srgbClr val="212A33"/>
                 </a:solidFill>
@@ -34880,7 +34880,7 @@
               </a:spcAft>
             </a:pPr>
             <a:r>
-              <a:rPr sz="1550" b="0" i="1">
+              <a:rPr sz="1859" b="0" i="1">
                 <a:solidFill>
                   <a:srgbClr val="5B6B73"/>
                 </a:solidFill>
@@ -35075,7 +35075,7 @@
               </a:spcAft>
             </a:pPr>
             <a:r>
-              <a:rPr sz="1250" b="1" i="0">
+              <a:rPr sz="1500" b="1" i="0">
                 <a:solidFill>
                   <a:srgbClr val="2A9D8F"/>
                 </a:solidFill>
@@ -35094,8 +35094,8 @@
         </p:nvSpPr>
         <p:spPr>
           <a:xfrm>
-            <a:off x="640080" y="822960"/>
-            <a:ext cx="10424160" cy="1005840"/>
+            <a:off x="640080" y="786384"/>
+            <a:ext cx="11064240" cy="914400"/>
           </a:xfrm>
           <a:prstGeom prst="rect">
             <a:avLst/>
@@ -35120,7 +35120,7 @@
               </a:spcAft>
             </a:pPr>
             <a:r>
-              <a:rPr sz="3200" b="1" i="0">
+              <a:rPr sz="3500" b="1" i="0">
                 <a:solidFill>
                   <a:srgbClr val="212A33"/>
                 </a:solidFill>
@@ -35140,7 +35140,7 @@
         <p:spPr>
           <a:xfrm>
             <a:off x="658368" y="1572768"/>
-            <a:ext cx="1371600" cy="54864"/>
+            <a:ext cx="1463040" cy="64008"/>
           </a:xfrm>
           <a:prstGeom prst="rect">
             <a:avLst/>
@@ -35209,7 +35209,7 @@
               </a:spcAft>
             </a:pPr>
             <a:r>
-              <a:rPr sz="1200" b="1" i="0">
+              <a:rPr sz="1439" b="1" i="0">
                 <a:solidFill>
                   <a:srgbClr val="5B6B73"/>
                 </a:solidFill>
@@ -35254,7 +35254,7 @@
               </a:spcAft>
             </a:pPr>
             <a:r>
-              <a:rPr sz="1000" b="0" i="0">
+              <a:rPr sz="1200" b="0" i="0">
                 <a:solidFill>
                   <a:srgbClr val="5B6B73"/>
                 </a:solidFill>
@@ -35397,7 +35397,7 @@
               </a:spcAft>
             </a:pPr>
             <a:r>
-              <a:rPr sz="1900" b="1" i="0">
+              <a:rPr sz="2280" b="1" i="0">
                 <a:solidFill>
                   <a:srgbClr val="2A9D8F"/>
                 </a:solidFill>
@@ -35419,7 +35419,7 @@
               </a:spcAft>
             </a:pPr>
             <a:r>
-              <a:rPr sz="1450" b="0" i="0">
+              <a:rPr sz="1739" b="0" i="0">
                 <a:solidFill>
                   <a:srgbClr val="212A33"/>
                 </a:solidFill>
@@ -35562,7 +35562,7 @@
               </a:spcAft>
             </a:pPr>
             <a:r>
-              <a:rPr sz="1900" b="1" i="0">
+              <a:rPr sz="2280" b="1" i="0">
                 <a:solidFill>
                   <a:srgbClr val="3A7CA5"/>
                 </a:solidFill>
@@ -35584,7 +35584,7 @@
               </a:spcAft>
             </a:pPr>
             <a:r>
-              <a:rPr sz="1450" b="0" i="0">
+              <a:rPr sz="1739" b="0" i="0">
                 <a:solidFill>
                   <a:srgbClr val="212A33"/>
                 </a:solidFill>
@@ -35727,7 +35727,7 @@
               </a:spcAft>
             </a:pPr>
             <a:r>
-              <a:rPr sz="1900" b="1" i="0">
+              <a:rPr sz="2280" b="1" i="0">
                 <a:solidFill>
                   <a:srgbClr val="6A4C93"/>
                 </a:solidFill>
@@ -35749,7 +35749,7 @@
               </a:spcAft>
             </a:pPr>
             <a:r>
-              <a:rPr sz="1450" b="0" i="0">
+              <a:rPr sz="1739" b="0" i="0">
                 <a:solidFill>
                   <a:srgbClr val="212A33"/>
                 </a:solidFill>
@@ -35892,7 +35892,7 @@
               </a:spcAft>
             </a:pPr>
             <a:r>
-              <a:rPr sz="1900" b="1" i="0">
+              <a:rPr sz="2280" b="1" i="0">
                 <a:solidFill>
                   <a:srgbClr val="E76F51"/>
                 </a:solidFill>
@@ -35914,7 +35914,7 @@
               </a:spcAft>
             </a:pPr>
             <a:r>
-              <a:rPr sz="1450" b="0" i="0">
+              <a:rPr sz="1739" b="0" i="0">
                 <a:solidFill>
                   <a:srgbClr val="212A33"/>
                 </a:solidFill>
@@ -36109,7 +36109,7 @@
               </a:spcAft>
             </a:pPr>
             <a:r>
-              <a:rPr sz="1250" b="1" i="0">
+              <a:rPr sz="1500" b="1" i="0">
                 <a:solidFill>
                   <a:srgbClr val="2A9D8F"/>
                 </a:solidFill>
@@ -36128,8 +36128,8 @@
         </p:nvSpPr>
         <p:spPr>
           <a:xfrm>
-            <a:off x="640080" y="822960"/>
-            <a:ext cx="10424160" cy="1005840"/>
+            <a:off x="640080" y="786384"/>
+            <a:ext cx="11064240" cy="914400"/>
           </a:xfrm>
           <a:prstGeom prst="rect">
             <a:avLst/>
@@ -36154,7 +36154,7 @@
               </a:spcAft>
             </a:pPr>
             <a:r>
-              <a:rPr sz="3200" b="1" i="0">
+              <a:rPr sz="3500" b="1" i="0">
                 <a:solidFill>
                   <a:srgbClr val="212A33"/>
                 </a:solidFill>
@@ -36174,7 +36174,7 @@
         <p:spPr>
           <a:xfrm>
             <a:off x="658368" y="1572768"/>
-            <a:ext cx="1371600" cy="54864"/>
+            <a:ext cx="1463040" cy="64008"/>
           </a:xfrm>
           <a:prstGeom prst="rect">
             <a:avLst/>
@@ -36243,7 +36243,7 @@
               </a:spcAft>
             </a:pPr>
             <a:r>
-              <a:rPr sz="1200" b="1" i="0">
+              <a:rPr sz="1439" b="1" i="0">
                 <a:solidFill>
                   <a:srgbClr val="5B6B73"/>
                 </a:solidFill>
@@ -36288,7 +36288,7 @@
               </a:spcAft>
             </a:pPr>
             <a:r>
-              <a:rPr sz="1000" b="0" i="0">
+              <a:rPr sz="1200" b="0" i="0">
                 <a:solidFill>
                   <a:srgbClr val="5B6B73"/>
                 </a:solidFill>
@@ -36333,7 +36333,7 @@
               </a:spcAft>
             </a:pPr>
             <a:r>
-              <a:rPr sz="1700" b="1" i="0">
+              <a:rPr sz="2039" b="1" i="0">
                 <a:solidFill>
                   <a:srgbClr val="2A9D8F"/>
                 </a:solidFill>
@@ -36342,7 +36342,7 @@
               <a:t>Honesty and integrity</a:t>
             </a:r>
             <a:r>
-              <a:rPr sz="1700" b="0" i="0">
+              <a:rPr sz="2039" b="0" i="0">
                 <a:solidFill>
                   <a:srgbClr val="212A33"/>
                 </a:solidFill>
@@ -36387,7 +36387,7 @@
               </a:spcAft>
             </a:pPr>
             <a:r>
-              <a:rPr sz="1600" b="1">
+              <a:rPr sz="1920" b="1">
                 <a:solidFill>
                   <a:srgbClr val="2A9D8F"/>
                 </a:solidFill>
@@ -36396,7 +36396,7 @@
               <a:t>•  </a:t>
             </a:r>
             <a:r>
-              <a:rPr sz="1600" b="0" i="0">
+              <a:rPr sz="1920" b="0" i="0">
                 <a:solidFill>
                   <a:srgbClr val="212A33"/>
                 </a:solidFill>
@@ -36405,7 +36405,7 @@
               <a:t>Never </a:t>
             </a:r>
             <a:r>
-              <a:rPr sz="1600" b="1" i="0">
+              <a:rPr sz="1920" b="1" i="0">
                 <a:solidFill>
                   <a:srgbClr val="212A33"/>
                 </a:solidFill>
@@ -36414,7 +36414,7 @@
               <a:t>falsifying</a:t>
             </a:r>
             <a:r>
-              <a:rPr sz="1600" b="0" i="0">
+              <a:rPr sz="1920" b="0" i="0">
                 <a:solidFill>
                   <a:srgbClr val="212A33"/>
                 </a:solidFill>
@@ -36423,7 +36423,7 @@
               <a:t> data, findings, or conclusions </a:t>
             </a:r>
             <a:r>
-              <a:rPr sz="1600" b="0" i="1">
+              <a:rPr sz="1920" b="0" i="1">
                 <a:solidFill>
                   <a:srgbClr val="5B6B73"/>
                 </a:solidFill>
@@ -36445,7 +36445,7 @@
               </a:spcAft>
             </a:pPr>
             <a:r>
-              <a:rPr sz="1600" b="1">
+              <a:rPr sz="1920" b="1">
                 <a:solidFill>
                   <a:srgbClr val="2A9D8F"/>
                 </a:solidFill>
@@ -36454,7 +36454,7 @@
               <a:t>•  </a:t>
             </a:r>
             <a:r>
-              <a:rPr sz="1600" b="0" i="0">
+              <a:rPr sz="1920" b="0" i="0">
                 <a:solidFill>
                   <a:srgbClr val="212A33"/>
                 </a:solidFill>
@@ -36463,7 +36463,7 @@
               <a:t>Reporting results </a:t>
             </a:r>
             <a:r>
-              <a:rPr sz="1600" b="0" i="1">
+              <a:rPr sz="1920" b="0" i="1">
                 <a:solidFill>
                   <a:srgbClr val="212A33"/>
                 </a:solidFill>
@@ -36472,7 +36472,7 @@
               <a:t>honestly</a:t>
             </a:r>
             <a:r>
-              <a:rPr sz="1600" b="0" i="0">
+              <a:rPr sz="1920" b="0" i="0">
                 <a:solidFill>
                   <a:srgbClr val="212A33"/>
                 </a:solidFill>
@@ -36615,7 +36615,7 @@
               </a:spcAft>
             </a:pPr>
             <a:r>
-              <a:rPr sz="1250" b="1" i="0">
+              <a:rPr sz="1500" b="1" i="0">
                 <a:solidFill>
                   <a:srgbClr val="2A9D8F"/>
                 </a:solidFill>
@@ -36637,7 +36637,7 @@
               </a:spcAft>
             </a:pPr>
             <a:r>
-              <a:rPr sz="1450" b="0" i="0">
+              <a:rPr sz="1739" b="0" i="0">
                 <a:solidFill>
                   <a:srgbClr val="212A33"/>
                 </a:solidFill>

--- a/Lecture2-Research-Ethics.pptx
+++ b/Lecture2-Research-Ethics.pptx
@@ -610,6 +610,12 @@
               <a:t>Visual: none necessary.</a:t>
             </a:r>
           </a:p>
+          <a:p/>
+          <a:p>
+            <a:r>
+              <a:t>[Provenance] The EXAMPLE on this slide is an instructor-created scenario (not drawn from the textbook). This label is kept in the notes only, not on the student slide.</a:t>
+            </a:r>
+          </a:p>
         </p:txBody>
       </p:sp>
       <p:sp>
@@ -686,6 +692,12 @@
               <a:t>Visual: none necessary.</a:t>
             </a:r>
           </a:p>
+          <a:p/>
+          <a:p>
+            <a:r>
+              <a:t>[Provenance] The EXAMPLE on this slide is an instructor-created scenario (not drawn from the textbook). This label is kept in the notes only, not on the student slide.</a:t>
+            </a:r>
+          </a:p>
         </p:txBody>
       </p:sp>
       <p:sp>
@@ -762,6 +774,12 @@
               <a:t>Visual: none necessary.</a:t>
             </a:r>
           </a:p>
+          <a:p/>
+          <a:p>
+            <a:r>
+              <a:t>[Provenance] The EXAMPLE on this slide is an instructor-created scenario (not drawn from the textbook). This label is kept in the notes only, not on the student slide.</a:t>
+            </a:r>
+          </a:p>
         </p:txBody>
       </p:sp>
       <p:sp>
@@ -914,6 +932,12 @@
               <a:t>Visual: the same five-stage flowchart from Slide 2, with the 'Planning' box highlighted. Reusing this exact graphic across Slides 12-15 lets students track lesson progress at a glance.</a:t>
             </a:r>
           </a:p>
+          <a:p/>
+          <a:p>
+            <a:r>
+              <a:t>[Provenance] The EXAMPLE on this slide is an instructor-created scenario (not drawn from the textbook). This label is kept in the notes only, not on the student slide.</a:t>
+            </a:r>
+          </a:p>
         </p:txBody>
       </p:sp>
       <p:sp>
@@ -990,6 +1014,12 @@
               <a:t>Visual: same flowchart graphic, now with 'Collecting Data' highlighted.</a:t>
             </a:r>
           </a:p>
+          <a:p/>
+          <a:p>
+            <a:r>
+              <a:t>[Provenance] The EXAMPLE on this slide is an instructor-created scenario (not drawn from the textbook). This label is kept in the notes only, not on the student slide.</a:t>
+            </a:r>
+          </a:p>
         </p:txBody>
       </p:sp>
       <p:sp>
@@ -1066,6 +1096,12 @@
               <a:t>Visual: same flowchart graphic, now with 'Analyzing Data' highlighted.</a:t>
             </a:r>
           </a:p>
+          <a:p/>
+          <a:p>
+            <a:r>
+              <a:t>[Provenance] The EXAMPLE on this slide is an instructor-created scenario (not drawn from the textbook). This label is kept in the notes only, not on the student slide.</a:t>
+            </a:r>
+          </a:p>
         </p:txBody>
       </p:sp>
       <p:sp>
@@ -1294,6 +1330,12 @@
               <a:t>Visual: none necessary.</a:t>
             </a:r>
           </a:p>
+          <a:p/>
+          <a:p>
+            <a:r>
+              <a:t>[Provenance] The EXAMPLE on this slide is an instructor-created scenario (not drawn from the textbook). This label is kept in the notes only, not on the student slide.</a:t>
+            </a:r>
+          </a:p>
         </p:txBody>
       </p:sp>
       <p:sp>
@@ -1972,6 +2014,12 @@
               <a:t>Visual: none necessary — the three fully formatted entries are themselves the instructional content.</a:t>
             </a:r>
           </a:p>
+          <a:p/>
+          <a:p>
+            <a:r>
+              <a:t>[Provenance] These three sample reference entries are instructor-created and formatted for illustration only.</a:t>
+            </a:r>
+          </a:p>
         </p:txBody>
       </p:sp>
       <p:sp>
@@ -2724,6 +2772,12 @@
           <a:p>
             <a:r>
               <a:t>Visual: none necessary — the example is brief enough to sit directly on the concept slide.</a:t>
+            </a:r>
+          </a:p>
+          <a:p/>
+          <a:p>
+            <a:r>
+              <a:t>[Provenance] The EXAMPLE on this slide is an instructor-created scenario (not drawn from the textbook). This label is kept in the notes only, not on the student slide.</a:t>
             </a:r>
           </a:p>
         </p:txBody>
@@ -7142,7 +7196,7 @@
                 </a:solidFill>
                 <a:latin typeface="Segoe UI Semibold"/>
               </a:rPr>
-              <a:t>EXAMPLE (Instructor-Created):  </a:t>
+              <a:t>EXAMPLE:  </a:t>
             </a:r>
           </a:p>
           <a:p>
@@ -7847,7 +7901,7 @@
                 </a:solidFill>
                 <a:latin typeface="Segoe UI Semibold"/>
               </a:rPr>
-              <a:t>EXAMPLE (Instructor-Created):  </a:t>
+              <a:t>EXAMPLE:  </a:t>
             </a:r>
           </a:p>
           <a:p>
@@ -8565,7 +8619,7 @@
                 </a:solidFill>
                 <a:latin typeface="Segoe UI Semibold"/>
               </a:rPr>
-              <a:t>EXAMPLE (Instructor-Created):  </a:t>
+              <a:t>EXAMPLE:  </a:t>
             </a:r>
           </a:p>
           <a:p>
@@ -11393,7 +11447,7 @@
                 </a:solidFill>
                 <a:latin typeface="Segoe UI Semibold"/>
               </a:rPr>
-              <a:t>EXAMPLE (Instructor-Created):  </a:t>
+              <a:t>EXAMPLE:  </a:t>
             </a:r>
           </a:p>
           <a:p>
@@ -12566,7 +12620,7 @@
                 </a:solidFill>
                 <a:latin typeface="Segoe UI Semibold"/>
               </a:rPr>
-              <a:t>EXAMPLE (Instructor-Created):  </a:t>
+              <a:t>EXAMPLE:  </a:t>
             </a:r>
           </a:p>
           <a:p>
@@ -13690,7 +13744,7 @@
                 </a:solidFill>
                 <a:latin typeface="Segoe UI Semibold"/>
               </a:rPr>
-              <a:t>EXAMPLE (Instructor-Created):  </a:t>
+              <a:t>EXAMPLE:  </a:t>
             </a:r>
           </a:p>
           <a:p>
@@ -17195,7 +17249,7 @@
                 </a:solidFill>
                 <a:latin typeface="Segoe UI Semibold"/>
               </a:rPr>
-              <a:t>EXAMPLE (Instructor-Created):  </a:t>
+              <a:t>EXAMPLE:  </a:t>
             </a:r>
           </a:p>
           <a:p>
@@ -17738,25 +17792,7 @@
                 </a:solidFill>
                 <a:latin typeface="Segoe UI"/>
               </a:rPr>
-              <a:t> — the “Ethical Issues” section and Table 4.1. Examples not from the textbook are labeled </a:t>
-            </a:r>
-            <a:r>
-              <a:rPr sz="1859" b="1" i="0">
-                <a:solidFill>
-                  <a:srgbClr val="212A33"/>
-                </a:solidFill>
-                <a:latin typeface="Segoe UI"/>
-              </a:rPr>
-              <a:t>Instructor-Created Example</a:t>
-            </a:r>
-            <a:r>
-              <a:rPr sz="1859" b="0" i="0">
-                <a:solidFill>
-                  <a:srgbClr val="212A33"/>
-                </a:solidFill>
-                <a:latin typeface="Segoe UI"/>
-              </a:rPr>
-              <a:t>.</a:t>
+              <a:t> — the “Ethical Issues” section and Table 4.1.</a:t>
             </a:r>
           </a:p>
         </p:txBody>
@@ -17912,8 +17948,8 @@
         </p:nvSpPr>
         <p:spPr>
           <a:xfrm>
-            <a:off x="6675120" y="2606040"/>
-            <a:ext cx="4526280" cy="3246120"/>
+            <a:off x="6675120" y="2651760"/>
+            <a:ext cx="4526280" cy="3200400"/>
           </a:xfrm>
           <a:prstGeom prst="rect">
             <a:avLst/>
@@ -17921,7 +17957,7 @@
           <a:noFill/>
         </p:spPr>
         <p:txBody>
-          <a:bodyPr wrap="square" anchor="t" lIns="0" rIns="0" tIns="0" bIns="0">
+          <a:bodyPr wrap="square" anchor="ctr" lIns="0" rIns="0" tIns="0" bIns="0">
             <a:spAutoFit/>
           </a:bodyPr>
           <a:lstStyle/>
@@ -17934,39 +17970,17 @@
                 <a:spcPts val="0"/>
               </a:spcBef>
               <a:spcAft>
-                <a:spcPts val="300"/>
-              </a:spcAft>
-            </a:pPr>
-            <a:r>
-              <a:rPr sz="2039" b="1" i="0">
-                <a:solidFill>
-                  <a:srgbClr val="0F4C5C"/>
-                </a:solidFill>
-                <a:latin typeface="Segoe UI Semibold"/>
-              </a:rPr>
-              <a:t>The Barangay Water Filter Project</a:t>
-            </a:r>
-          </a:p>
-          <a:p>
-            <a:pPr algn="l">
-              <a:lnSpc>
-                <a:spcPct val="106000"/>
-              </a:lnSpc>
-              <a:spcBef>
-                <a:spcPts val="0"/>
-              </a:spcBef>
-              <a:spcAft>
                 <a:spcPts val="800"/>
               </a:spcAft>
             </a:pPr>
             <a:r>
-              <a:rPr sz="1439" b="0" i="1">
-                <a:solidFill>
-                  <a:srgbClr val="5B6B73"/>
-                </a:solidFill>
-                <a:latin typeface="Segoe UI"/>
-              </a:rPr>
-              <a:t>Instructor-Created Example</a:t>
+              <a:rPr sz="2039" b="1" i="0">
+                <a:solidFill>
+                  <a:srgbClr val="0F4C5C"/>
+                </a:solidFill>
+                <a:latin typeface="Segoe UI Semibold"/>
+              </a:rPr>
+              <a:t>The Barangay Water Filter Project</a:t>
             </a:r>
           </a:p>
           <a:p>
@@ -25818,58 +25832,13 @@
       </p:sp>
       <p:sp>
         <p:nvSpPr>
-          <p:cNvPr id="10" name="TextBox 9"/>
-          <p:cNvSpPr txBox="1"/>
-          <p:nvPr/>
-        </p:nvSpPr>
-        <p:spPr>
-          <a:xfrm>
-            <a:off x="640080" y="1737360"/>
-            <a:ext cx="10881360" cy="411480"/>
-          </a:xfrm>
-          <a:prstGeom prst="rect">
-            <a:avLst/>
-          </a:prstGeom>
-          <a:noFill/>
-        </p:spPr>
-        <p:txBody>
-          <a:bodyPr wrap="square" anchor="t" lIns="0" rIns="0" tIns="0" bIns="0">
-            <a:spAutoFit/>
-          </a:bodyPr>
-          <a:lstStyle/>
-          <a:p>
-            <a:pPr algn="l">
-              <a:lnSpc>
-                <a:spcPct val="106000"/>
-              </a:lnSpc>
-              <a:spcBef>
-                <a:spcPts val="0"/>
-              </a:spcBef>
-              <a:spcAft>
-                <a:spcPts val="0"/>
-              </a:spcAft>
-            </a:pPr>
-            <a:r>
-              <a:rPr sz="1620" b="0" i="1">
-                <a:solidFill>
-                  <a:srgbClr val="5B6B73"/>
-                </a:solidFill>
-                <a:latin typeface="Segoe UI"/>
-              </a:rPr>
-              <a:t>Instructor-Created Examples, formatted for illustration</a:t>
-            </a:r>
-          </a:p>
-        </p:txBody>
-      </p:sp>
-      <p:sp>
-        <p:nvSpPr>
-          <p:cNvPr id="11" name="Rounded Rectangle 10"/>
+          <p:cNvPr id="10" name="Rounded Rectangle 9"/>
           <p:cNvSpPr/>
           <p:nvPr/>
         </p:nvSpPr>
         <p:spPr>
           <a:xfrm>
-            <a:off x="640080" y="2286000"/>
+            <a:off x="640080" y="2103120"/>
             <a:ext cx="10881360" cy="1234440"/>
           </a:xfrm>
           <a:prstGeom prst="roundRect">
@@ -25917,13 +25886,13 @@
       </p:sp>
       <p:sp>
         <p:nvSpPr>
-          <p:cNvPr id="12" name="Round Same Side Corner Rectangle 11"/>
+          <p:cNvPr id="11" name="Round Same Side Corner Rectangle 10"/>
           <p:cNvSpPr/>
           <p:nvPr/>
         </p:nvSpPr>
         <p:spPr>
           <a:xfrm>
-            <a:off x="640080" y="2286000"/>
+            <a:off x="640080" y="2103120"/>
             <a:ext cx="2103120" cy="1234440"/>
           </a:xfrm>
           <a:prstGeom prst="round2SameRect">
@@ -25961,13 +25930,13 @@
       </p:sp>
       <p:sp>
         <p:nvSpPr>
-          <p:cNvPr id="13" name="TextBox 12"/>
+          <p:cNvPr id="12" name="TextBox 11"/>
           <p:cNvSpPr txBox="1"/>
           <p:nvPr/>
         </p:nvSpPr>
         <p:spPr>
           <a:xfrm>
-            <a:off x="731520" y="2286000"/>
+            <a:off x="731520" y="2103120"/>
             <a:ext cx="1920240" cy="1234440"/>
           </a:xfrm>
           <a:prstGeom prst="rect">
@@ -26006,13 +25975,13 @@
       </p:sp>
       <p:sp>
         <p:nvSpPr>
-          <p:cNvPr id="14" name="TextBox 13"/>
+          <p:cNvPr id="13" name="TextBox 12"/>
           <p:cNvSpPr txBox="1"/>
           <p:nvPr/>
         </p:nvSpPr>
         <p:spPr>
           <a:xfrm>
-            <a:off x="2926080" y="2423160"/>
+            <a:off x="2926080" y="2240279"/>
             <a:ext cx="8366760" cy="960120"/>
           </a:xfrm>
           <a:prstGeom prst="rect">
@@ -26069,13 +26038,13 @@
       </p:sp>
       <p:sp>
         <p:nvSpPr>
-          <p:cNvPr id="15" name="Rounded Rectangle 14"/>
+          <p:cNvPr id="14" name="Rounded Rectangle 13"/>
           <p:cNvSpPr/>
           <p:nvPr/>
         </p:nvSpPr>
         <p:spPr>
           <a:xfrm>
-            <a:off x="640080" y="3703320"/>
+            <a:off x="640080" y="3538728"/>
             <a:ext cx="10881360" cy="1234440"/>
           </a:xfrm>
           <a:prstGeom prst="roundRect">
@@ -26123,13 +26092,13 @@
       </p:sp>
       <p:sp>
         <p:nvSpPr>
-          <p:cNvPr id="16" name="Round Same Side Corner Rectangle 15"/>
+          <p:cNvPr id="15" name="Round Same Side Corner Rectangle 14"/>
           <p:cNvSpPr/>
           <p:nvPr/>
         </p:nvSpPr>
         <p:spPr>
           <a:xfrm>
-            <a:off x="640080" y="3703320"/>
+            <a:off x="640080" y="3538728"/>
             <a:ext cx="2103120" cy="1234440"/>
           </a:xfrm>
           <a:prstGeom prst="round2SameRect">
@@ -26167,13 +26136,13 @@
       </p:sp>
       <p:sp>
         <p:nvSpPr>
-          <p:cNvPr id="17" name="TextBox 16"/>
+          <p:cNvPr id="16" name="TextBox 15"/>
           <p:cNvSpPr txBox="1"/>
           <p:nvPr/>
         </p:nvSpPr>
         <p:spPr>
           <a:xfrm>
-            <a:off x="731520" y="3703320"/>
+            <a:off x="731520" y="3538728"/>
             <a:ext cx="1920240" cy="1234440"/>
           </a:xfrm>
           <a:prstGeom prst="rect">
@@ -26212,13 +26181,13 @@
       </p:sp>
       <p:sp>
         <p:nvSpPr>
-          <p:cNvPr id="18" name="TextBox 17"/>
+          <p:cNvPr id="17" name="TextBox 16"/>
           <p:cNvSpPr txBox="1"/>
           <p:nvPr/>
         </p:nvSpPr>
         <p:spPr>
           <a:xfrm>
-            <a:off x="2926080" y="3840480"/>
+            <a:off x="2926080" y="3675888"/>
             <a:ext cx="8366760" cy="960120"/>
           </a:xfrm>
           <a:prstGeom prst="rect">
@@ -26275,13 +26244,13 @@
       </p:sp>
       <p:sp>
         <p:nvSpPr>
-          <p:cNvPr id="19" name="Rounded Rectangle 18"/>
+          <p:cNvPr id="18" name="Rounded Rectangle 17"/>
           <p:cNvSpPr/>
           <p:nvPr/>
         </p:nvSpPr>
         <p:spPr>
           <a:xfrm>
-            <a:off x="640080" y="5120640"/>
+            <a:off x="640080" y="4974336"/>
             <a:ext cx="10881360" cy="1234440"/>
           </a:xfrm>
           <a:prstGeom prst="roundRect">
@@ -26329,13 +26298,13 @@
       </p:sp>
       <p:sp>
         <p:nvSpPr>
-          <p:cNvPr id="20" name="Round Same Side Corner Rectangle 19"/>
+          <p:cNvPr id="19" name="Round Same Side Corner Rectangle 18"/>
           <p:cNvSpPr/>
           <p:nvPr/>
         </p:nvSpPr>
         <p:spPr>
           <a:xfrm>
-            <a:off x="640080" y="5120640"/>
+            <a:off x="640080" y="4974336"/>
             <a:ext cx="2103120" cy="1234440"/>
           </a:xfrm>
           <a:prstGeom prst="round2SameRect">
@@ -26373,13 +26342,13 @@
       </p:sp>
       <p:sp>
         <p:nvSpPr>
-          <p:cNvPr id="21" name="TextBox 20"/>
+          <p:cNvPr id="20" name="TextBox 19"/>
           <p:cNvSpPr txBox="1"/>
           <p:nvPr/>
         </p:nvSpPr>
         <p:spPr>
           <a:xfrm>
-            <a:off x="731520" y="5120640"/>
+            <a:off x="731520" y="4974336"/>
             <a:ext cx="1920240" cy="1234440"/>
           </a:xfrm>
           <a:prstGeom prst="rect">
@@ -26418,13 +26387,13 @@
       </p:sp>
       <p:sp>
         <p:nvSpPr>
-          <p:cNvPr id="22" name="TextBox 21"/>
+          <p:cNvPr id="21" name="TextBox 20"/>
           <p:cNvSpPr txBox="1"/>
           <p:nvPr/>
         </p:nvSpPr>
         <p:spPr>
           <a:xfrm>
-            <a:off x="2926080" y="5257800"/>
+            <a:off x="2926080" y="5111496"/>
             <a:ext cx="8366760" cy="960120"/>
           </a:xfrm>
           <a:prstGeom prst="rect">
@@ -36621,7 +36590,7 @@
                 </a:solidFill>
                 <a:latin typeface="Segoe UI Semibold"/>
               </a:rPr>
-              <a:t>EXAMPLE (Instructor-Created):  </a:t>
+              <a:t>EXAMPLE:  </a:t>
             </a:r>
           </a:p>
           <a:p>
